--- a/Figures/2D-Explanation.pptx
+++ b/Figures/2D-Explanation.pptx
@@ -104,11 +104,520 @@
       </a:defRPr>
     </a:lvl9pPr>
   </p:defaultTextStyle>
+  <p:extLst>
+    <p:ext uri="{EFAFB233-063F-42B5-8137-9DF3F51BA10A}">
+      <p15:sldGuideLst xmlns:p15="http://schemas.microsoft.com/office/powerpoint/2012/main"/>
+    </p:ext>
+  </p:extLst>
 </p:presentation>
+</file>
+
+<file path=ppt/revisionInfo.xml><?xml version="1.0" encoding="utf-8"?>
+<p1510:revInfo xmlns:a="http://schemas.openxmlformats.org/drawingml/2006/main" xmlns:r="http://schemas.openxmlformats.org/officeDocument/2006/relationships" xmlns:p1510="http://schemas.microsoft.com/office/powerpoint/2015/10/main">
+  <p1510:revLst>
+    <p1510:client id="{9A213102-995F-481D-BB68-47B25C627B82}" v="4" dt="2026-04-18T16:41:59.067"/>
+  </p1510:revLst>
+</p1510:revInfo>
 </file>
 
 <file path=ppt/changesInfos/changesInfo1.xml><?xml version="1.0" encoding="utf-8"?>
 <pc:chgInfo xmlns:a="http://schemas.openxmlformats.org/drawingml/2006/main" xmlns:r="http://schemas.openxmlformats.org/officeDocument/2006/relationships" xmlns:ac="http://schemas.microsoft.com/office/drawing/2013/main/command" xmlns:pc="http://schemas.microsoft.com/office/powerpoint/2013/main/command">
+  <pc:docChgLst>
+    <pc:chgData name="Michal Jan Gajda" userId="44ec69bc-7c51-442e-9fb8-e23cec7d728e" providerId="ADAL" clId="{E140FEBE-BC1C-4B6E-8A3B-6F68765ADD48}"/>
+    <pc:docChg chg="undo custSel modSld">
+      <pc:chgData name="Michal Jan Gajda" userId="44ec69bc-7c51-442e-9fb8-e23cec7d728e" providerId="ADAL" clId="{E140FEBE-BC1C-4B6E-8A3B-6F68765ADD48}" dt="2026-04-18T16:48:19.317" v="398" actId="1036"/>
+      <pc:docMkLst>
+        <pc:docMk/>
+      </pc:docMkLst>
+      <pc:sldChg chg="addSp delSp modSp mod">
+        <pc:chgData name="Michal Jan Gajda" userId="44ec69bc-7c51-442e-9fb8-e23cec7d728e" providerId="ADAL" clId="{E140FEBE-BC1C-4B6E-8A3B-6F68765ADD48}" dt="2026-04-18T16:48:19.317" v="398" actId="1036"/>
+        <pc:sldMkLst>
+          <pc:docMk/>
+          <pc:sldMk cId="2470576341" sldId="256"/>
+        </pc:sldMkLst>
+        <pc:spChg chg="mod">
+          <ac:chgData name="Michal Jan Gajda" userId="44ec69bc-7c51-442e-9fb8-e23cec7d728e" providerId="ADAL" clId="{E140FEBE-BC1C-4B6E-8A3B-6F68765ADD48}" dt="2026-04-18T16:23:14.704" v="29" actId="1076"/>
+          <ac:spMkLst>
+            <pc:docMk/>
+            <pc:sldMk cId="2470576341" sldId="256"/>
+            <ac:spMk id="5" creationId="{DCAC7D65-32C7-A7B7-BAAF-2883B072D608}"/>
+          </ac:spMkLst>
+        </pc:spChg>
+        <pc:spChg chg="mod">
+          <ac:chgData name="Michal Jan Gajda" userId="44ec69bc-7c51-442e-9fb8-e23cec7d728e" providerId="ADAL" clId="{E140FEBE-BC1C-4B6E-8A3B-6F68765ADD48}" dt="2026-04-18T16:23:14.704" v="29" actId="1076"/>
+          <ac:spMkLst>
+            <pc:docMk/>
+            <pc:sldMk cId="2470576341" sldId="256"/>
+            <ac:spMk id="7" creationId="{6A220B1B-34A5-B82A-8CA2-7FE57F3BBB9F}"/>
+          </ac:spMkLst>
+        </pc:spChg>
+        <pc:spChg chg="mod">
+          <ac:chgData name="Michal Jan Gajda" userId="44ec69bc-7c51-442e-9fb8-e23cec7d728e" providerId="ADAL" clId="{E140FEBE-BC1C-4B6E-8A3B-6F68765ADD48}" dt="2026-04-18T16:23:14.704" v="29" actId="1076"/>
+          <ac:spMkLst>
+            <pc:docMk/>
+            <pc:sldMk cId="2470576341" sldId="256"/>
+            <ac:spMk id="8" creationId="{D202A147-5CC9-84FB-FDCC-C65AD74C3C47}"/>
+          </ac:spMkLst>
+        </pc:spChg>
+        <pc:spChg chg="mod">
+          <ac:chgData name="Michal Jan Gajda" userId="44ec69bc-7c51-442e-9fb8-e23cec7d728e" providerId="ADAL" clId="{E140FEBE-BC1C-4B6E-8A3B-6F68765ADD48}" dt="2026-04-18T16:23:14.704" v="29" actId="1076"/>
+          <ac:spMkLst>
+            <pc:docMk/>
+            <pc:sldMk cId="2470576341" sldId="256"/>
+            <ac:spMk id="9" creationId="{403D6E63-D0F1-D580-F3C6-8397E54FCFD4}"/>
+          </ac:spMkLst>
+        </pc:spChg>
+        <pc:spChg chg="mod">
+          <ac:chgData name="Michal Jan Gajda" userId="44ec69bc-7c51-442e-9fb8-e23cec7d728e" providerId="ADAL" clId="{E140FEBE-BC1C-4B6E-8A3B-6F68765ADD48}" dt="2026-04-18T16:23:14.704" v="29" actId="1076"/>
+          <ac:spMkLst>
+            <pc:docMk/>
+            <pc:sldMk cId="2470576341" sldId="256"/>
+            <ac:spMk id="10" creationId="{B27DB626-8358-5935-6148-19B840231B8E}"/>
+          </ac:spMkLst>
+        </pc:spChg>
+        <pc:spChg chg="mod">
+          <ac:chgData name="Michal Jan Gajda" userId="44ec69bc-7c51-442e-9fb8-e23cec7d728e" providerId="ADAL" clId="{E140FEBE-BC1C-4B6E-8A3B-6F68765ADD48}" dt="2026-04-18T16:23:14.704" v="29" actId="1076"/>
+          <ac:spMkLst>
+            <pc:docMk/>
+            <pc:sldMk cId="2470576341" sldId="256"/>
+            <ac:spMk id="11" creationId="{5855FFEF-1527-B64F-3834-A8B7DC73BCB4}"/>
+          </ac:spMkLst>
+        </pc:spChg>
+        <pc:spChg chg="mod">
+          <ac:chgData name="Michal Jan Gajda" userId="44ec69bc-7c51-442e-9fb8-e23cec7d728e" providerId="ADAL" clId="{E140FEBE-BC1C-4B6E-8A3B-6F68765ADD48}" dt="2026-04-18T16:23:14.704" v="29" actId="1076"/>
+          <ac:spMkLst>
+            <pc:docMk/>
+            <pc:sldMk cId="2470576341" sldId="256"/>
+            <ac:spMk id="12" creationId="{C57EA2AE-AEE3-A6C6-B654-02ED7A98F9C6}"/>
+          </ac:spMkLst>
+        </pc:spChg>
+        <pc:spChg chg="mod">
+          <ac:chgData name="Michal Jan Gajda" userId="44ec69bc-7c51-442e-9fb8-e23cec7d728e" providerId="ADAL" clId="{E140FEBE-BC1C-4B6E-8A3B-6F68765ADD48}" dt="2026-04-18T16:23:14.704" v="29" actId="1076"/>
+          <ac:spMkLst>
+            <pc:docMk/>
+            <pc:sldMk cId="2470576341" sldId="256"/>
+            <ac:spMk id="18" creationId="{1FD1DDE8-6C51-954F-95CB-B8320A3EFAA3}"/>
+          </ac:spMkLst>
+        </pc:spChg>
+        <pc:spChg chg="mod">
+          <ac:chgData name="Michal Jan Gajda" userId="44ec69bc-7c51-442e-9fb8-e23cec7d728e" providerId="ADAL" clId="{E140FEBE-BC1C-4B6E-8A3B-6F68765ADD48}" dt="2026-04-18T16:31:52.243" v="102" actId="1036"/>
+          <ac:spMkLst>
+            <pc:docMk/>
+            <pc:sldMk cId="2470576341" sldId="256"/>
+            <ac:spMk id="39" creationId="{E0B6BE7D-D1EA-67D0-5778-E258B39511C6}"/>
+          </ac:spMkLst>
+        </pc:spChg>
+        <pc:spChg chg="mod">
+          <ac:chgData name="Michal Jan Gajda" userId="44ec69bc-7c51-442e-9fb8-e23cec7d728e" providerId="ADAL" clId="{E140FEBE-BC1C-4B6E-8A3B-6F68765ADD48}" dt="2026-04-18T16:33:06.908" v="109" actId="14100"/>
+          <ac:spMkLst>
+            <pc:docMk/>
+            <pc:sldMk cId="2470576341" sldId="256"/>
+            <ac:spMk id="46" creationId="{0C401232-817C-461B-150C-EFBC9A409D0F}"/>
+          </ac:spMkLst>
+        </pc:spChg>
+        <pc:spChg chg="mod">
+          <ac:chgData name="Michal Jan Gajda" userId="44ec69bc-7c51-442e-9fb8-e23cec7d728e" providerId="ADAL" clId="{E140FEBE-BC1C-4B6E-8A3B-6F68765ADD48}" dt="2026-04-18T16:31:52.243" v="102" actId="1036"/>
+          <ac:spMkLst>
+            <pc:docMk/>
+            <pc:sldMk cId="2470576341" sldId="256"/>
+            <ac:spMk id="51" creationId="{C53A6661-29B0-6D2F-E842-F8A4F51976F5}"/>
+          </ac:spMkLst>
+        </pc:spChg>
+        <pc:spChg chg="mod">
+          <ac:chgData name="Michal Jan Gajda" userId="44ec69bc-7c51-442e-9fb8-e23cec7d728e" providerId="ADAL" clId="{E140FEBE-BC1C-4B6E-8A3B-6F68765ADD48}" dt="2026-04-18T16:31:58.781" v="104" actId="1076"/>
+          <ac:spMkLst>
+            <pc:docMk/>
+            <pc:sldMk cId="2470576341" sldId="256"/>
+            <ac:spMk id="63" creationId="{7D944585-1BF1-DB2E-2BE9-D7F9D39652D3}"/>
+          </ac:spMkLst>
+        </pc:spChg>
+        <pc:spChg chg="mod">
+          <ac:chgData name="Michal Jan Gajda" userId="44ec69bc-7c51-442e-9fb8-e23cec7d728e" providerId="ADAL" clId="{E140FEBE-BC1C-4B6E-8A3B-6F68765ADD48}" dt="2026-04-18T16:48:06.097" v="386" actId="1036"/>
+          <ac:spMkLst>
+            <pc:docMk/>
+            <pc:sldMk cId="2470576341" sldId="256"/>
+            <ac:spMk id="66" creationId="{43C9A01B-1FC4-0A36-D6D9-B9C7ECB9EC50}"/>
+          </ac:spMkLst>
+        </pc:spChg>
+        <pc:spChg chg="mod">
+          <ac:chgData name="Michal Jan Gajda" userId="44ec69bc-7c51-442e-9fb8-e23cec7d728e" providerId="ADAL" clId="{E140FEBE-BC1C-4B6E-8A3B-6F68765ADD48}" dt="2026-04-18T16:34:49.702" v="136" actId="1076"/>
+          <ac:spMkLst>
+            <pc:docMk/>
+            <pc:sldMk cId="2470576341" sldId="256"/>
+            <ac:spMk id="67" creationId="{A3AF3722-F113-5DBD-550B-D5F53626916C}"/>
+          </ac:spMkLst>
+        </pc:spChg>
+        <pc:spChg chg="mod">
+          <ac:chgData name="Michal Jan Gajda" userId="44ec69bc-7c51-442e-9fb8-e23cec7d728e" providerId="ADAL" clId="{E140FEBE-BC1C-4B6E-8A3B-6F68765ADD48}" dt="2026-04-18T16:47:51.381" v="373" actId="20577"/>
+          <ac:spMkLst>
+            <pc:docMk/>
+            <pc:sldMk cId="2470576341" sldId="256"/>
+            <ac:spMk id="71" creationId="{5EBF3B63-02CA-C924-3F2A-52B42188B3C8}"/>
+          </ac:spMkLst>
+        </pc:spChg>
+        <pc:spChg chg="mod">
+          <ac:chgData name="Michal Jan Gajda" userId="44ec69bc-7c51-442e-9fb8-e23cec7d728e" providerId="ADAL" clId="{E140FEBE-BC1C-4B6E-8A3B-6F68765ADD48}" dt="2026-04-18T16:48:02.904" v="381" actId="1036"/>
+          <ac:spMkLst>
+            <pc:docMk/>
+            <pc:sldMk cId="2470576341" sldId="256"/>
+            <ac:spMk id="104" creationId="{4072F602-F50B-D009-C61C-EB1E9FD75C92}"/>
+          </ac:spMkLst>
+        </pc:spChg>
+        <pc:spChg chg="mod">
+          <ac:chgData name="Michal Jan Gajda" userId="44ec69bc-7c51-442e-9fb8-e23cec7d728e" providerId="ADAL" clId="{E140FEBE-BC1C-4B6E-8A3B-6F68765ADD48}" dt="2026-04-18T16:47:40.757" v="372" actId="1035"/>
+          <ac:spMkLst>
+            <pc:docMk/>
+            <pc:sldMk cId="2470576341" sldId="256"/>
+            <ac:spMk id="109" creationId="{40F3A1D6-10E0-7FB6-68A0-75607326132A}"/>
+          </ac:spMkLst>
+        </pc:spChg>
+        <pc:spChg chg="mod">
+          <ac:chgData name="Michal Jan Gajda" userId="44ec69bc-7c51-442e-9fb8-e23cec7d728e" providerId="ADAL" clId="{E140FEBE-BC1C-4B6E-8A3B-6F68765ADD48}" dt="2026-04-18T16:48:13.866" v="391" actId="1035"/>
+          <ac:spMkLst>
+            <pc:docMk/>
+            <pc:sldMk cId="2470576341" sldId="256"/>
+            <ac:spMk id="111" creationId="{225DA475-2FC9-A44A-A7FB-4D4DDDCD8F70}"/>
+          </ac:spMkLst>
+        </pc:spChg>
+        <pc:spChg chg="mod">
+          <ac:chgData name="Michal Jan Gajda" userId="44ec69bc-7c51-442e-9fb8-e23cec7d728e" providerId="ADAL" clId="{E140FEBE-BC1C-4B6E-8A3B-6F68765ADD48}" dt="2026-04-18T16:48:19.317" v="398" actId="1036"/>
+          <ac:spMkLst>
+            <pc:docMk/>
+            <pc:sldMk cId="2470576341" sldId="256"/>
+            <ac:spMk id="115" creationId="{DA653333-9CF9-3073-1C1F-67AB38570810}"/>
+          </ac:spMkLst>
+        </pc:spChg>
+        <pc:spChg chg="mod">
+          <ac:chgData name="Michal Jan Gajda" userId="44ec69bc-7c51-442e-9fb8-e23cec7d728e" providerId="ADAL" clId="{E140FEBE-BC1C-4B6E-8A3B-6F68765ADD48}" dt="2026-04-18T16:48:16.911" v="395" actId="1036"/>
+          <ac:spMkLst>
+            <pc:docMk/>
+            <pc:sldMk cId="2470576341" sldId="256"/>
+            <ac:spMk id="133" creationId="{E94D2AA5-AEC7-4B02-DDE2-7A39294CAC33}"/>
+          </ac:spMkLst>
+        </pc:spChg>
+        <pc:spChg chg="mod">
+          <ac:chgData name="Michal Jan Gajda" userId="44ec69bc-7c51-442e-9fb8-e23cec7d728e" providerId="ADAL" clId="{E140FEBE-BC1C-4B6E-8A3B-6F68765ADD48}" dt="2026-04-18T16:46:29.964" v="284" actId="1037"/>
+          <ac:spMkLst>
+            <pc:docMk/>
+            <pc:sldMk cId="2470576341" sldId="256"/>
+            <ac:spMk id="158" creationId="{3FDCD5A2-ACAE-AAFF-D7F6-201B3D0F2B30}"/>
+          </ac:spMkLst>
+        </pc:spChg>
+        <pc:picChg chg="mod">
+          <ac:chgData name="Michal Jan Gajda" userId="44ec69bc-7c51-442e-9fb8-e23cec7d728e" providerId="ADAL" clId="{E140FEBE-BC1C-4B6E-8A3B-6F68765ADD48}" dt="2026-04-18T16:23:14.704" v="29" actId="1076"/>
+          <ac:picMkLst>
+            <pc:docMk/>
+            <pc:sldMk cId="2470576341" sldId="256"/>
+            <ac:picMk id="16" creationId="{62843B62-E38E-02EB-B85C-B5EE7C76C867}"/>
+          </ac:picMkLst>
+        </pc:picChg>
+        <pc:picChg chg="mod">
+          <ac:chgData name="Michal Jan Gajda" userId="44ec69bc-7c51-442e-9fb8-e23cec7d728e" providerId="ADAL" clId="{E140FEBE-BC1C-4B6E-8A3B-6F68765ADD48}" dt="2026-04-18T16:31:27.364" v="97" actId="1076"/>
+          <ac:picMkLst>
+            <pc:docMk/>
+            <pc:sldMk cId="2470576341" sldId="256"/>
+            <ac:picMk id="42" creationId="{F3242D43-FD53-1F6B-1CFF-176166C63002}"/>
+          </ac:picMkLst>
+        </pc:picChg>
+        <pc:picChg chg="mod">
+          <ac:chgData name="Michal Jan Gajda" userId="44ec69bc-7c51-442e-9fb8-e23cec7d728e" providerId="ADAL" clId="{E140FEBE-BC1C-4B6E-8A3B-6F68765ADD48}" dt="2026-04-18T16:31:27.364" v="97" actId="1076"/>
+          <ac:picMkLst>
+            <pc:docMk/>
+            <pc:sldMk cId="2470576341" sldId="256"/>
+            <ac:picMk id="58" creationId="{ED477D63-F0B3-F859-0576-9952B7CA9E33}"/>
+          </ac:picMkLst>
+        </pc:picChg>
+        <pc:picChg chg="mod">
+          <ac:chgData name="Michal Jan Gajda" userId="44ec69bc-7c51-442e-9fb8-e23cec7d728e" providerId="ADAL" clId="{E140FEBE-BC1C-4B6E-8A3B-6F68765ADD48}" dt="2026-04-18T16:31:27.364" v="97" actId="1076"/>
+          <ac:picMkLst>
+            <pc:docMk/>
+            <pc:sldMk cId="2470576341" sldId="256"/>
+            <ac:picMk id="61" creationId="{ACB03130-EB71-F128-58EE-331AA4925363}"/>
+          </ac:picMkLst>
+        </pc:picChg>
+        <pc:picChg chg="mod">
+          <ac:chgData name="Michal Jan Gajda" userId="44ec69bc-7c51-442e-9fb8-e23cec7d728e" providerId="ADAL" clId="{E140FEBE-BC1C-4B6E-8A3B-6F68765ADD48}" dt="2026-04-18T16:35:01.581" v="137" actId="12789"/>
+          <ac:picMkLst>
+            <pc:docMk/>
+            <pc:sldMk cId="2470576341" sldId="256"/>
+            <ac:picMk id="69" creationId="{5C139528-B824-C667-A905-0070B473A1E3}"/>
+          </ac:picMkLst>
+        </pc:picChg>
+        <pc:picChg chg="mod">
+          <ac:chgData name="Michal Jan Gajda" userId="44ec69bc-7c51-442e-9fb8-e23cec7d728e" providerId="ADAL" clId="{E140FEBE-BC1C-4B6E-8A3B-6F68765ADD48}" dt="2026-04-18T16:35:01.581" v="137" actId="12789"/>
+          <ac:picMkLst>
+            <pc:docMk/>
+            <pc:sldMk cId="2470576341" sldId="256"/>
+            <ac:picMk id="70" creationId="{86662C84-5B29-6228-5E44-1BAD03C8CA4F}"/>
+          </ac:picMkLst>
+        </pc:picChg>
+        <pc:picChg chg="mod">
+          <ac:chgData name="Michal Jan Gajda" userId="44ec69bc-7c51-442e-9fb8-e23cec7d728e" providerId="ADAL" clId="{E140FEBE-BC1C-4B6E-8A3B-6F68765ADD48}" dt="2026-04-18T16:24:52.125" v="37" actId="1076"/>
+          <ac:picMkLst>
+            <pc:docMk/>
+            <pc:sldMk cId="2470576341" sldId="256"/>
+            <ac:picMk id="96" creationId="{203FAA89-B5C2-2299-6A9E-5222DDCE2238}"/>
+          </ac:picMkLst>
+        </pc:picChg>
+        <pc:picChg chg="mod">
+          <ac:chgData name="Michal Jan Gajda" userId="44ec69bc-7c51-442e-9fb8-e23cec7d728e" providerId="ADAL" clId="{E140FEBE-BC1C-4B6E-8A3B-6F68765ADD48}" dt="2026-04-18T16:46:55.459" v="291" actId="1076"/>
+          <ac:picMkLst>
+            <pc:docMk/>
+            <pc:sldMk cId="2470576341" sldId="256"/>
+            <ac:picMk id="98" creationId="{52EE91CF-384B-7DD8-AAE9-4BBF282E73EB}"/>
+          </ac:picMkLst>
+        </pc:picChg>
+        <pc:picChg chg="mod">
+          <ac:chgData name="Michal Jan Gajda" userId="44ec69bc-7c51-442e-9fb8-e23cec7d728e" providerId="ADAL" clId="{E140FEBE-BC1C-4B6E-8A3B-6F68765ADD48}" dt="2026-04-18T16:47:25.154" v="361" actId="1076"/>
+          <ac:picMkLst>
+            <pc:docMk/>
+            <pc:sldMk cId="2470576341" sldId="256"/>
+            <ac:picMk id="112" creationId="{36152C27-808D-66D0-A6E2-67A7CC997F58}"/>
+          </ac:picMkLst>
+        </pc:picChg>
+        <pc:picChg chg="mod">
+          <ac:chgData name="Michal Jan Gajda" userId="44ec69bc-7c51-442e-9fb8-e23cec7d728e" providerId="ADAL" clId="{E140FEBE-BC1C-4B6E-8A3B-6F68765ADD48}" dt="2026-04-18T16:40:03.010" v="188" actId="12789"/>
+          <ac:picMkLst>
+            <pc:docMk/>
+            <pc:sldMk cId="2470576341" sldId="256"/>
+            <ac:picMk id="125" creationId="{3CAB0E08-DF26-6043-BC53-746812E7F050}"/>
+          </ac:picMkLst>
+        </pc:picChg>
+        <pc:picChg chg="mod">
+          <ac:chgData name="Michal Jan Gajda" userId="44ec69bc-7c51-442e-9fb8-e23cec7d728e" providerId="ADAL" clId="{E140FEBE-BC1C-4B6E-8A3B-6F68765ADD48}" dt="2026-04-18T16:40:18.534" v="189" actId="1076"/>
+          <ac:picMkLst>
+            <pc:docMk/>
+            <pc:sldMk cId="2470576341" sldId="256"/>
+            <ac:picMk id="131" creationId="{135618AF-3247-157E-2C26-382AE430C518}"/>
+          </ac:picMkLst>
+        </pc:picChg>
+        <pc:picChg chg="mod">
+          <ac:chgData name="Michal Jan Gajda" userId="44ec69bc-7c51-442e-9fb8-e23cec7d728e" providerId="ADAL" clId="{E140FEBE-BC1C-4B6E-8A3B-6F68765ADD48}" dt="2026-04-18T16:46:19.976" v="269" actId="1076"/>
+          <ac:picMkLst>
+            <pc:docMk/>
+            <pc:sldMk cId="2470576341" sldId="256"/>
+            <ac:picMk id="155" creationId="{4387999D-7DC3-FA47-D8B9-338B534A83EA}"/>
+          </ac:picMkLst>
+        </pc:picChg>
+        <pc:picChg chg="mod">
+          <ac:chgData name="Michal Jan Gajda" userId="44ec69bc-7c51-442e-9fb8-e23cec7d728e" providerId="ADAL" clId="{E140FEBE-BC1C-4B6E-8A3B-6F68765ADD48}" dt="2026-04-18T16:46:29.964" v="284" actId="1037"/>
+          <ac:picMkLst>
+            <pc:docMk/>
+            <pc:sldMk cId="2470576341" sldId="256"/>
+            <ac:picMk id="160" creationId="{A80012DC-B04E-11B0-C70D-86E4EA278E3F}"/>
+          </ac:picMkLst>
+        </pc:picChg>
+        <pc:cxnChg chg="add del mod">
+          <ac:chgData name="Michal Jan Gajda" userId="44ec69bc-7c51-442e-9fb8-e23cec7d728e" providerId="ADAL" clId="{E140FEBE-BC1C-4B6E-8A3B-6F68765ADD48}" dt="2026-04-18T16:37:38.736" v="144" actId="478"/>
+          <ac:cxnSpMkLst>
+            <pc:docMk/>
+            <pc:sldMk cId="2470576341" sldId="256"/>
+            <ac:cxnSpMk id="2" creationId="{7A6ECD5A-0CC7-3AAB-BB9A-B626CE2CEE1C}"/>
+          </ac:cxnSpMkLst>
+        </pc:cxnChg>
+        <pc:cxnChg chg="add mod">
+          <ac:chgData name="Michal Jan Gajda" userId="44ec69bc-7c51-442e-9fb8-e23cec7d728e" providerId="ADAL" clId="{E140FEBE-BC1C-4B6E-8A3B-6F68765ADD48}" dt="2026-04-18T16:37:46.474" v="146" actId="14100"/>
+          <ac:cxnSpMkLst>
+            <pc:docMk/>
+            <pc:sldMk cId="2470576341" sldId="256"/>
+            <ac:cxnSpMk id="24" creationId="{F21963F7-4264-0AF0-6DF9-039AF8DDDC7F}"/>
+          </ac:cxnSpMkLst>
+        </pc:cxnChg>
+        <pc:cxnChg chg="add mod">
+          <ac:chgData name="Michal Jan Gajda" userId="44ec69bc-7c51-442e-9fb8-e23cec7d728e" providerId="ADAL" clId="{E140FEBE-BC1C-4B6E-8A3B-6F68765ADD48}" dt="2026-04-18T16:39:05.519" v="181" actId="14100"/>
+          <ac:cxnSpMkLst>
+            <pc:docMk/>
+            <pc:sldMk cId="2470576341" sldId="256"/>
+            <ac:cxnSpMk id="29" creationId="{3FAC87F6-44FC-5AD4-FD50-635C8271473B}"/>
+          </ac:cxnSpMkLst>
+        </pc:cxnChg>
+        <pc:cxnChg chg="add del mod">
+          <ac:chgData name="Michal Jan Gajda" userId="44ec69bc-7c51-442e-9fb8-e23cec7d728e" providerId="ADAL" clId="{E140FEBE-BC1C-4B6E-8A3B-6F68765ADD48}" dt="2026-04-18T16:40:22.477" v="191" actId="478"/>
+          <ac:cxnSpMkLst>
+            <pc:docMk/>
+            <pc:sldMk cId="2470576341" sldId="256"/>
+            <ac:cxnSpMk id="35" creationId="{A8931181-6A80-E9A1-DD69-7F14C69BF6D7}"/>
+          </ac:cxnSpMkLst>
+        </pc:cxnChg>
+        <pc:cxnChg chg="add del mod">
+          <ac:chgData name="Michal Jan Gajda" userId="44ec69bc-7c51-442e-9fb8-e23cec7d728e" providerId="ADAL" clId="{E140FEBE-BC1C-4B6E-8A3B-6F68765ADD48}" dt="2026-04-18T16:40:39.220" v="196" actId="11529"/>
+          <ac:cxnSpMkLst>
+            <pc:docMk/>
+            <pc:sldMk cId="2470576341" sldId="256"/>
+            <ac:cxnSpMk id="37" creationId="{4440C566-872F-61DD-F025-E1540D36D168}"/>
+          </ac:cxnSpMkLst>
+        </pc:cxnChg>
+        <pc:cxnChg chg="add mod">
+          <ac:chgData name="Michal Jan Gajda" userId="44ec69bc-7c51-442e-9fb8-e23cec7d728e" providerId="ADAL" clId="{E140FEBE-BC1C-4B6E-8A3B-6F68765ADD48}" dt="2026-04-18T16:41:57.648" v="208" actId="1076"/>
+          <ac:cxnSpMkLst>
+            <pc:docMk/>
+            <pc:sldMk cId="2470576341" sldId="256"/>
+            <ac:cxnSpMk id="40" creationId="{1317CB07-B9F1-FA0E-0460-D3DD2DCE7A48}"/>
+          </ac:cxnSpMkLst>
+        </pc:cxnChg>
+        <pc:cxnChg chg="add mod">
+          <ac:chgData name="Michal Jan Gajda" userId="44ec69bc-7c51-442e-9fb8-e23cec7d728e" providerId="ADAL" clId="{E140FEBE-BC1C-4B6E-8A3B-6F68765ADD48}" dt="2026-04-18T16:47:14.495" v="302" actId="1076"/>
+          <ac:cxnSpMkLst>
+            <pc:docMk/>
+            <pc:sldMk cId="2470576341" sldId="256"/>
+            <ac:cxnSpMk id="48" creationId="{350F9C43-F513-AA2B-A16C-B87F28165869}"/>
+          </ac:cxnSpMkLst>
+        </pc:cxnChg>
+        <pc:cxnChg chg="del mod">
+          <ac:chgData name="Michal Jan Gajda" userId="44ec69bc-7c51-442e-9fb8-e23cec7d728e" providerId="ADAL" clId="{E140FEBE-BC1C-4B6E-8A3B-6F68765ADD48}" dt="2026-04-18T16:37:53.377" v="147" actId="478"/>
+          <ac:cxnSpMkLst>
+            <pc:docMk/>
+            <pc:sldMk cId="2470576341" sldId="256"/>
+            <ac:cxnSpMk id="77" creationId="{49E80798-D4E8-5F24-188C-7399CB5951D6}"/>
+          </ac:cxnSpMkLst>
+        </pc:cxnChg>
+        <pc:cxnChg chg="add del">
+          <ac:chgData name="Michal Jan Gajda" userId="44ec69bc-7c51-442e-9fb8-e23cec7d728e" providerId="ADAL" clId="{E140FEBE-BC1C-4B6E-8A3B-6F68765ADD48}" dt="2026-04-18T16:26:34.896" v="48" actId="478"/>
+          <ac:cxnSpMkLst>
+            <pc:docMk/>
+            <pc:sldMk cId="2470576341" sldId="256"/>
+            <ac:cxnSpMk id="86" creationId="{FB45087A-EECA-7B11-D407-19B50883497F}"/>
+          </ac:cxnSpMkLst>
+        </pc:cxnChg>
+        <pc:cxnChg chg="mod">
+          <ac:chgData name="Michal Jan Gajda" userId="44ec69bc-7c51-442e-9fb8-e23cec7d728e" providerId="ADAL" clId="{E140FEBE-BC1C-4B6E-8A3B-6F68765ADD48}" dt="2026-04-18T16:46:41.911" v="287" actId="14100"/>
+          <ac:cxnSpMkLst>
+            <pc:docMk/>
+            <pc:sldMk cId="2470576341" sldId="256"/>
+            <ac:cxnSpMk id="89" creationId="{8D1BD9C3-23B5-DAF0-812A-C3F21CDAB6E4}"/>
+          </ac:cxnSpMkLst>
+        </pc:cxnChg>
+        <pc:cxnChg chg="mod">
+          <ac:chgData name="Michal Jan Gajda" userId="44ec69bc-7c51-442e-9fb8-e23cec7d728e" providerId="ADAL" clId="{E140FEBE-BC1C-4B6E-8A3B-6F68765ADD48}" dt="2026-04-18T16:33:19.393" v="110" actId="14100"/>
+          <ac:cxnSpMkLst>
+            <pc:docMk/>
+            <pc:sldMk cId="2470576341" sldId="256"/>
+            <ac:cxnSpMk id="90" creationId="{FD08F39E-76BB-45C0-1791-0CC900BCF990}"/>
+          </ac:cxnSpMkLst>
+        </pc:cxnChg>
+        <pc:cxnChg chg="mod">
+          <ac:chgData name="Michal Jan Gajda" userId="44ec69bc-7c51-442e-9fb8-e23cec7d728e" providerId="ADAL" clId="{E140FEBE-BC1C-4B6E-8A3B-6F68765ADD48}" dt="2026-04-18T16:35:01.581" v="137" actId="12789"/>
+          <ac:cxnSpMkLst>
+            <pc:docMk/>
+            <pc:sldMk cId="2470576341" sldId="256"/>
+            <ac:cxnSpMk id="91" creationId="{046D4D3E-39D4-E08D-46C0-2D80F68A64F6}"/>
+          </ac:cxnSpMkLst>
+        </pc:cxnChg>
+        <pc:cxnChg chg="mod">
+          <ac:chgData name="Michal Jan Gajda" userId="44ec69bc-7c51-442e-9fb8-e23cec7d728e" providerId="ADAL" clId="{E140FEBE-BC1C-4B6E-8A3B-6F68765ADD48}" dt="2026-04-18T16:35:01.581" v="137" actId="12789"/>
+          <ac:cxnSpMkLst>
+            <pc:docMk/>
+            <pc:sldMk cId="2470576341" sldId="256"/>
+            <ac:cxnSpMk id="92" creationId="{D6D1C01D-56C4-088F-6F49-99DCAC323848}"/>
+          </ac:cxnSpMkLst>
+        </pc:cxnChg>
+        <pc:cxnChg chg="mod">
+          <ac:chgData name="Michal Jan Gajda" userId="44ec69bc-7c51-442e-9fb8-e23cec7d728e" providerId="ADAL" clId="{E140FEBE-BC1C-4B6E-8A3B-6F68765ADD48}" dt="2026-04-18T16:23:39.852" v="31" actId="465"/>
+          <ac:cxnSpMkLst>
+            <pc:docMk/>
+            <pc:sldMk cId="2470576341" sldId="256"/>
+            <ac:cxnSpMk id="103" creationId="{30F0B232-AB24-BE6A-1313-641F187B49EE}"/>
+          </ac:cxnSpMkLst>
+        </pc:cxnChg>
+        <pc:cxnChg chg="mod">
+          <ac:chgData name="Michal Jan Gajda" userId="44ec69bc-7c51-442e-9fb8-e23cec7d728e" providerId="ADAL" clId="{E140FEBE-BC1C-4B6E-8A3B-6F68765ADD48}" dt="2026-04-18T16:46:53.474" v="290" actId="1076"/>
+          <ac:cxnSpMkLst>
+            <pc:docMk/>
+            <pc:sldMk cId="2470576341" sldId="256"/>
+            <ac:cxnSpMk id="108" creationId="{A0197A8E-C917-22E6-BEA7-A4B9D90B3234}"/>
+          </ac:cxnSpMkLst>
+        </pc:cxnChg>
+        <pc:cxnChg chg="mod">
+          <ac:chgData name="Michal Jan Gajda" userId="44ec69bc-7c51-442e-9fb8-e23cec7d728e" providerId="ADAL" clId="{E140FEBE-BC1C-4B6E-8A3B-6F68765ADD48}" dt="2026-04-18T16:47:28.143" v="362" actId="14100"/>
+          <ac:cxnSpMkLst>
+            <pc:docMk/>
+            <pc:sldMk cId="2470576341" sldId="256"/>
+            <ac:cxnSpMk id="110" creationId="{E67B9692-19D1-3610-5A0B-1C331B372B16}"/>
+          </ac:cxnSpMkLst>
+        </pc:cxnChg>
+        <pc:cxnChg chg="del">
+          <ac:chgData name="Michal Jan Gajda" userId="44ec69bc-7c51-442e-9fb8-e23cec7d728e" providerId="ADAL" clId="{E140FEBE-BC1C-4B6E-8A3B-6F68765ADD48}" dt="2026-04-18T16:39:19.404" v="185" actId="478"/>
+          <ac:cxnSpMkLst>
+            <pc:docMk/>
+            <pc:sldMk cId="2470576341" sldId="256"/>
+            <ac:cxnSpMk id="120" creationId="{FF4EEC87-8F20-F2A0-41FA-9975413D870A}"/>
+          </ac:cxnSpMkLst>
+        </pc:cxnChg>
+        <pc:cxnChg chg="mod">
+          <ac:chgData name="Michal Jan Gajda" userId="44ec69bc-7c51-442e-9fb8-e23cec7d728e" providerId="ADAL" clId="{E140FEBE-BC1C-4B6E-8A3B-6F68765ADD48}" dt="2026-04-18T16:31:27.364" v="97" actId="1076"/>
+          <ac:cxnSpMkLst>
+            <pc:docMk/>
+            <pc:sldMk cId="2470576341" sldId="256"/>
+            <ac:cxnSpMk id="132" creationId="{93DEA70C-11A4-26FA-CB05-97C900A386D0}"/>
+          </ac:cxnSpMkLst>
+        </pc:cxnChg>
+        <pc:cxnChg chg="del">
+          <ac:chgData name="Michal Jan Gajda" userId="44ec69bc-7c51-442e-9fb8-e23cec7d728e" providerId="ADAL" clId="{E140FEBE-BC1C-4B6E-8A3B-6F68765ADD48}" dt="2026-04-18T16:37:39.780" v="145" actId="478"/>
+          <ac:cxnSpMkLst>
+            <pc:docMk/>
+            <pc:sldMk cId="2470576341" sldId="256"/>
+            <ac:cxnSpMk id="137" creationId="{4F6BB34D-C8BE-30C4-95E1-3D8E25949670}"/>
+          </ac:cxnSpMkLst>
+        </pc:cxnChg>
+        <pc:cxnChg chg="add del">
+          <ac:chgData name="Michal Jan Gajda" userId="44ec69bc-7c51-442e-9fb8-e23cec7d728e" providerId="ADAL" clId="{E140FEBE-BC1C-4B6E-8A3B-6F68765ADD48}" dt="2026-04-18T16:45:51.952" v="266" actId="478"/>
+          <ac:cxnSpMkLst>
+            <pc:docMk/>
+            <pc:sldMk cId="2470576341" sldId="256"/>
+            <ac:cxnSpMk id="141" creationId="{469D9899-91C7-F6E7-A2A6-D97E00808839}"/>
+          </ac:cxnSpMkLst>
+        </pc:cxnChg>
+        <pc:cxnChg chg="del">
+          <ac:chgData name="Michal Jan Gajda" userId="44ec69bc-7c51-442e-9fb8-e23cec7d728e" providerId="ADAL" clId="{E140FEBE-BC1C-4B6E-8A3B-6F68765ADD48}" dt="2026-04-18T16:39:41.254" v="186" actId="478"/>
+          <ac:cxnSpMkLst>
+            <pc:docMk/>
+            <pc:sldMk cId="2470576341" sldId="256"/>
+            <ac:cxnSpMk id="142" creationId="{D1C716F9-A63A-43BD-D5F5-B7ABD9A37659}"/>
+          </ac:cxnSpMkLst>
+        </pc:cxnChg>
+        <pc:cxnChg chg="add del mod">
+          <ac:chgData name="Michal Jan Gajda" userId="44ec69bc-7c51-442e-9fb8-e23cec7d728e" providerId="ADAL" clId="{E140FEBE-BC1C-4B6E-8A3B-6F68765ADD48}" dt="2026-04-18T16:47:23.420" v="360" actId="1035"/>
+          <ac:cxnSpMkLst>
+            <pc:docMk/>
+            <pc:sldMk cId="2470576341" sldId="256"/>
+            <ac:cxnSpMk id="145" creationId="{CEDF56C2-A6A2-5445-CD8E-3AEB88302D2B}"/>
+          </ac:cxnSpMkLst>
+        </pc:cxnChg>
+        <pc:cxnChg chg="mod">
+          <ac:chgData name="Michal Jan Gajda" userId="44ec69bc-7c51-442e-9fb8-e23cec7d728e" providerId="ADAL" clId="{E140FEBE-BC1C-4B6E-8A3B-6F68765ADD48}" dt="2026-04-18T16:35:01.581" v="137" actId="12789"/>
+          <ac:cxnSpMkLst>
+            <pc:docMk/>
+            <pc:sldMk cId="2470576341" sldId="256"/>
+            <ac:cxnSpMk id="147" creationId="{211FD106-B506-B16F-935F-5105D354AD30}"/>
+          </ac:cxnSpMkLst>
+        </pc:cxnChg>
+        <pc:cxnChg chg="del mod">
+          <ac:chgData name="Michal Jan Gajda" userId="44ec69bc-7c51-442e-9fb8-e23cec7d728e" providerId="ADAL" clId="{E140FEBE-BC1C-4B6E-8A3B-6F68765ADD48}" dt="2026-04-18T16:40:26.089" v="192" actId="478"/>
+          <ac:cxnSpMkLst>
+            <pc:docMk/>
+            <pc:sldMk cId="2470576341" sldId="256"/>
+            <ac:cxnSpMk id="149" creationId="{22647B2F-8272-9CE6-310F-10CDF7F45156}"/>
+          </ac:cxnSpMkLst>
+        </pc:cxnChg>
+        <pc:cxnChg chg="del">
+          <ac:chgData name="Michal Jan Gajda" userId="44ec69bc-7c51-442e-9fb8-e23cec7d728e" providerId="ADAL" clId="{E140FEBE-BC1C-4B6E-8A3B-6F68765ADD48}" dt="2026-04-18T16:45:22.895" v="248" actId="478"/>
+          <ac:cxnSpMkLst>
+            <pc:docMk/>
+            <pc:sldMk cId="2470576341" sldId="256"/>
+            <ac:cxnSpMk id="151" creationId="{F6C28FE1-C106-1432-DACD-95189EC16388}"/>
+          </ac:cxnSpMkLst>
+        </pc:cxnChg>
+        <pc:cxnChg chg="mod">
+          <ac:chgData name="Michal Jan Gajda" userId="44ec69bc-7c51-442e-9fb8-e23cec7d728e" providerId="ADAL" clId="{E140FEBE-BC1C-4B6E-8A3B-6F68765ADD48}" dt="2026-04-18T16:46:29.964" v="284" actId="1037"/>
+          <ac:cxnSpMkLst>
+            <pc:docMk/>
+            <pc:sldMk cId="2470576341" sldId="256"/>
+            <ac:cxnSpMk id="157" creationId="{B915FBB9-9CF7-653C-A75E-7ACF1AD58C9B}"/>
+          </ac:cxnSpMkLst>
+        </pc:cxnChg>
+      </pc:sldChg>
+    </pc:docChg>
+  </pc:docChgLst>
   <pc:docChgLst>
     <pc:chgData name="Michal Jan Gajda" userId="44ec69bc-7c51-442e-9fb8-e23cec7d728e" providerId="ADAL" clId="{D1D4C124-314B-534E-A27A-2CE09AFC5016}"/>
     <pc:docChg chg="modSld">
@@ -181,7 +690,6 @@
               <a:rPr lang="en-US"/>
               <a:t>Click to edit Master title style</a:t>
             </a:r>
-            <a:endParaRPr lang="en-US" dirty="0"/>
           </a:p>
         </p:txBody>
       </p:sp>
@@ -246,7 +754,6 @@
               <a:rPr lang="en-US"/>
               <a:t>Click to edit Master subtitle style</a:t>
             </a:r>
-            <a:endParaRPr lang="en-US" dirty="0"/>
           </a:p>
         </p:txBody>
       </p:sp>
@@ -364,7 +871,6 @@
               <a:rPr lang="en-US"/>
               <a:t>Click to edit Master title style</a:t>
             </a:r>
-            <a:endParaRPr lang="en-US" dirty="0"/>
           </a:p>
         </p:txBody>
       </p:sp>
@@ -416,7 +922,6 @@
               <a:rPr lang="en-US"/>
               <a:t>Fifth level</a:t>
             </a:r>
-            <a:endParaRPr lang="en-US" dirty="0"/>
           </a:p>
         </p:txBody>
       </p:sp>
@@ -539,7 +1044,6 @@
               <a:rPr lang="en-US"/>
               <a:t>Click to edit Master title style</a:t>
             </a:r>
-            <a:endParaRPr lang="en-US" dirty="0"/>
           </a:p>
         </p:txBody>
       </p:sp>
@@ -596,7 +1100,6 @@
               <a:rPr lang="en-US"/>
               <a:t>Fifth level</a:t>
             </a:r>
-            <a:endParaRPr lang="en-US" dirty="0"/>
           </a:p>
         </p:txBody>
       </p:sp>
@@ -714,7 +1217,6 @@
               <a:rPr lang="en-US"/>
               <a:t>Click to edit Master title style</a:t>
             </a:r>
-            <a:endParaRPr lang="en-US" dirty="0"/>
           </a:p>
         </p:txBody>
       </p:sp>
@@ -766,7 +1268,6 @@
               <a:rPr lang="en-US"/>
               <a:t>Fifth level</a:t>
             </a:r>
-            <a:endParaRPr lang="en-US" dirty="0"/>
           </a:p>
         </p:txBody>
       </p:sp>
@@ -893,7 +1394,6 @@
               <a:rPr lang="en-US"/>
               <a:t>Click to edit Master title style</a:t>
             </a:r>
-            <a:endParaRPr lang="en-US" dirty="0"/>
           </a:p>
         </p:txBody>
       </p:sp>
@@ -1130,7 +1630,6 @@
               <a:rPr lang="en-US"/>
               <a:t>Click to edit Master title style</a:t>
             </a:r>
-            <a:endParaRPr lang="en-US" dirty="0"/>
           </a:p>
         </p:txBody>
       </p:sp>
@@ -1187,7 +1686,6 @@
               <a:rPr lang="en-US"/>
               <a:t>Fifth level</a:t>
             </a:r>
-            <a:endParaRPr lang="en-US" dirty="0"/>
           </a:p>
         </p:txBody>
       </p:sp>
@@ -1244,7 +1742,6 @@
               <a:rPr lang="en-US"/>
               <a:t>Fifth level</a:t>
             </a:r>
-            <a:endParaRPr lang="en-US" dirty="0"/>
           </a:p>
         </p:txBody>
       </p:sp>
@@ -1367,7 +1864,6 @@
               <a:rPr lang="en-US"/>
               <a:t>Click to edit Master title style</a:t>
             </a:r>
-            <a:endParaRPr lang="en-US" dirty="0"/>
           </a:p>
         </p:txBody>
       </p:sp>
@@ -1489,7 +1985,6 @@
               <a:rPr lang="en-US"/>
               <a:t>Fifth level</a:t>
             </a:r>
-            <a:endParaRPr lang="en-US" dirty="0"/>
           </a:p>
         </p:txBody>
       </p:sp>
@@ -1611,7 +2106,6 @@
               <a:rPr lang="en-US"/>
               <a:t>Fifth level</a:t>
             </a:r>
-            <a:endParaRPr lang="en-US" dirty="0"/>
           </a:p>
         </p:txBody>
       </p:sp>
@@ -1729,7 +2223,6 @@
               <a:rPr lang="en-US"/>
               <a:t>Click to edit Master title style</a:t>
             </a:r>
-            <a:endParaRPr lang="en-US" dirty="0"/>
           </a:p>
         </p:txBody>
       </p:sp>
@@ -1951,7 +2444,6 @@
               <a:rPr lang="en-US"/>
               <a:t>Click to edit Master title style</a:t>
             </a:r>
-            <a:endParaRPr lang="en-US" dirty="0"/>
           </a:p>
         </p:txBody>
       </p:sp>
@@ -2036,7 +2528,6 @@
               <a:rPr lang="en-US"/>
               <a:t>Fifth level</a:t>
             </a:r>
-            <a:endParaRPr lang="en-US" dirty="0"/>
           </a:p>
         </p:txBody>
       </p:sp>
@@ -2228,7 +2719,6 @@
               <a:rPr lang="en-US"/>
               <a:t>Click to edit Master title style</a:t>
             </a:r>
-            <a:endParaRPr lang="en-US" dirty="0"/>
           </a:p>
         </p:txBody>
       </p:sp>
@@ -2293,7 +2783,6 @@
               <a:rPr lang="en-US"/>
               <a:t>Click icon to add picture</a:t>
             </a:r>
-            <a:endParaRPr lang="en-US" dirty="0"/>
           </a:p>
         </p:txBody>
       </p:sp>
@@ -2491,7 +2980,6 @@
               <a:rPr lang="en-US"/>
               <a:t>Click to edit Master title style</a:t>
             </a:r>
-            <a:endParaRPr lang="en-US" dirty="0"/>
           </a:p>
         </p:txBody>
       </p:sp>
@@ -2553,7 +3041,6 @@
               <a:rPr lang="en-US"/>
               <a:t>Fifth level</a:t>
             </a:r>
-            <a:endParaRPr lang="en-US" dirty="0"/>
           </a:p>
         </p:txBody>
       </p:sp>
@@ -3011,7 +3498,7 @@
         </p:nvSpPr>
         <p:spPr>
           <a:xfrm>
-            <a:off x="1465943" y="10417629"/>
+            <a:off x="1342702" y="9351610"/>
             <a:ext cx="914400" cy="914400"/>
           </a:xfrm>
           <a:prstGeom prst="rect">
@@ -3040,7 +3527,7 @@
           <a:p>
             <a:pPr algn="ctr"/>
             <a:r>
-              <a:rPr lang="en-US" sz="4400" dirty="0"/>
+              <a:rPr lang="en-US" sz="4400"/>
               <a:t>M</a:t>
             </a:r>
           </a:p>
@@ -3060,7 +3547,7 @@
         </p:nvSpPr>
         <p:spPr>
           <a:xfrm>
-            <a:off x="2380343" y="10417629"/>
+            <a:off x="2257102" y="9351610"/>
             <a:ext cx="914400" cy="914400"/>
           </a:xfrm>
           <a:prstGeom prst="rect">
@@ -3092,7 +3579,7 @@
           <a:p>
             <a:pPr algn="ctr"/>
             <a:r>
-              <a:rPr lang="en-US" sz="4400" dirty="0"/>
+              <a:rPr lang="en-US" sz="4400"/>
               <a:t>V</a:t>
             </a:r>
           </a:p>
@@ -3112,7 +3599,7 @@
         </p:nvSpPr>
         <p:spPr>
           <a:xfrm>
-            <a:off x="3294743" y="10417629"/>
+            <a:off x="3171502" y="9351610"/>
             <a:ext cx="914400" cy="914400"/>
           </a:xfrm>
           <a:prstGeom prst="rect">
@@ -3147,7 +3634,7 @@
           <a:p>
             <a:pPr algn="ctr"/>
             <a:r>
-              <a:rPr lang="en-US" sz="4400" dirty="0"/>
+              <a:rPr lang="en-US" sz="4400"/>
               <a:t>S</a:t>
             </a:r>
           </a:p>
@@ -3167,7 +3654,7 @@
         </p:nvSpPr>
         <p:spPr>
           <a:xfrm>
-            <a:off x="4209143" y="10417629"/>
+            <a:off x="4085902" y="9351610"/>
             <a:ext cx="914400" cy="914400"/>
           </a:xfrm>
           <a:prstGeom prst="rect">
@@ -3204,7 +3691,7 @@
           <a:p>
             <a:pPr algn="ctr"/>
             <a:r>
-              <a:rPr lang="en-US" sz="4400" dirty="0"/>
+              <a:rPr lang="en-US" sz="4400"/>
               <a:t>…</a:t>
             </a:r>
           </a:p>
@@ -3224,7 +3711,7 @@
         </p:nvSpPr>
         <p:spPr>
           <a:xfrm>
-            <a:off x="5141472" y="10417629"/>
+            <a:off x="5018231" y="9351610"/>
             <a:ext cx="914400" cy="914400"/>
           </a:xfrm>
           <a:prstGeom prst="rect">
@@ -3264,7 +3751,7 @@
           <a:p>
             <a:pPr algn="ctr"/>
             <a:r>
-              <a:rPr lang="en-US" sz="4400" dirty="0"/>
+              <a:rPr lang="en-US" sz="4400"/>
               <a:t>K</a:t>
             </a:r>
           </a:p>
@@ -3284,7 +3771,7 @@
         </p:nvSpPr>
         <p:spPr>
           <a:xfrm>
-            <a:off x="1465943" y="8980055"/>
+            <a:off x="1342702" y="7914036"/>
             <a:ext cx="4572000" cy="1446550"/>
           </a:xfrm>
           <a:prstGeom prst="rect">
@@ -3300,7 +3787,7 @@
           <a:p>
             <a:pPr algn="ctr"/>
             <a:r>
-              <a:rPr lang="en-US" sz="4400" dirty="0"/>
+              <a:rPr lang="en-US" sz="4400"/>
               <a:t>2D Protein Sequence</a:t>
             </a:r>
           </a:p>
@@ -3320,7 +3807,7 @@
         </p:nvSpPr>
         <p:spPr>
           <a:xfrm>
-            <a:off x="2931886" y="11531600"/>
+            <a:off x="2808645" y="10465581"/>
             <a:ext cx="1643743" cy="1643743"/>
           </a:xfrm>
           <a:prstGeom prst="mathPlus">
@@ -3381,7 +3868,7 @@
         </p:blipFill>
         <p:spPr>
           <a:xfrm>
-            <a:off x="1462728" y="14187715"/>
+            <a:off x="1339487" y="13121696"/>
             <a:ext cx="4705844" cy="2931886"/>
           </a:xfrm>
           <a:prstGeom prst="rect">
@@ -3403,7 +3890,7 @@
         </p:nvSpPr>
         <p:spPr>
           <a:xfrm>
-            <a:off x="1465943" y="13044055"/>
+            <a:off x="1342702" y="11978036"/>
             <a:ext cx="4572000" cy="769441"/>
           </a:xfrm>
           <a:prstGeom prst="rect">
@@ -3419,7 +3906,7 @@
           <a:p>
             <a:pPr algn="ctr"/>
             <a:r>
-              <a:rPr lang="en-US" sz="4400" dirty="0"/>
+              <a:rPr lang="en-US" sz="4400"/>
               <a:t>Chromophore</a:t>
             </a:r>
           </a:p>
@@ -3439,8 +3926,8 @@
         </p:nvSpPr>
         <p:spPr>
           <a:xfrm>
-            <a:off x="6762498" y="6716958"/>
-            <a:ext cx="2956333" cy="1323439"/>
+            <a:off x="6983442" y="7479676"/>
+            <a:ext cx="3622225" cy="707886"/>
           </a:xfrm>
           <a:prstGeom prst="rect">
             <a:avLst/>
@@ -3455,7 +3942,7 @@
           <a:p>
             <a:pPr algn="ctr"/>
             <a:r>
-              <a:rPr lang="en-US" sz="4000" dirty="0"/>
+              <a:rPr lang="en-US" sz="4000"/>
               <a:t>ESM Encoding</a:t>
             </a:r>
           </a:p>
@@ -3489,7 +3976,7 @@
         </p:blipFill>
         <p:spPr>
           <a:xfrm>
-            <a:off x="9785662" y="7312149"/>
+            <a:off x="10578729" y="7285337"/>
             <a:ext cx="1828173" cy="1828173"/>
           </a:xfrm>
           <a:prstGeom prst="rect">
@@ -3511,8 +3998,8 @@
         </p:nvSpPr>
         <p:spPr>
           <a:xfrm>
-            <a:off x="11664249" y="6350091"/>
-            <a:ext cx="2745039" cy="1323439"/>
+            <a:off x="12167257" y="6864123"/>
+            <a:ext cx="2936315" cy="1323439"/>
           </a:xfrm>
           <a:prstGeom prst="rect">
             <a:avLst/>
@@ -3527,7 +4014,7 @@
           <a:p>
             <a:pPr algn="ctr"/>
             <a:r>
-              <a:rPr lang="en-US" sz="4000" dirty="0"/>
+              <a:rPr lang="en-US" sz="4000"/>
               <a:t>Residue Embedding</a:t>
             </a:r>
           </a:p>
@@ -3547,8 +4034,8 @@
         </p:nvSpPr>
         <p:spPr>
           <a:xfrm>
-            <a:off x="16799621" y="6153134"/>
-            <a:ext cx="2136371" cy="1323439"/>
+            <a:off x="17385462" y="6864123"/>
+            <a:ext cx="2614273" cy="1323439"/>
           </a:xfrm>
           <a:prstGeom prst="rect">
             <a:avLst/>
@@ -3563,7 +4050,7 @@
           <a:p>
             <a:pPr algn="ctr"/>
             <a:r>
-              <a:rPr lang="en-US" sz="4000" dirty="0"/>
+              <a:rPr lang="en-US" sz="4000"/>
               <a:t>Mean Pooling</a:t>
             </a:r>
           </a:p>
@@ -3591,7 +4078,7 @@
         </p:blipFill>
         <p:spPr>
           <a:xfrm>
-            <a:off x="14757513" y="7476573"/>
+            <a:off x="15470991" y="7379389"/>
             <a:ext cx="1640068" cy="1640068"/>
           </a:xfrm>
           <a:prstGeom prst="rect">
@@ -3621,7 +4108,7 @@
         </p:blipFill>
         <p:spPr>
           <a:xfrm>
-            <a:off x="19395768" y="7901509"/>
+            <a:off x="20367154" y="7997849"/>
             <a:ext cx="2351697" cy="403148"/>
           </a:xfrm>
           <a:prstGeom prst="rect">
@@ -3643,8 +4130,8 @@
         </p:nvSpPr>
         <p:spPr>
           <a:xfrm>
-            <a:off x="18285616" y="8748858"/>
-            <a:ext cx="4572000" cy="1200329"/>
+            <a:off x="19306290" y="8504101"/>
+            <a:ext cx="4350268" cy="1200329"/>
           </a:xfrm>
           <a:prstGeom prst="rect">
             <a:avLst/>
@@ -3659,7 +4146,7 @@
           <a:p>
             <a:pPr algn="ctr"/>
             <a:r>
-              <a:rPr lang="en-US" sz="3600" dirty="0"/>
+              <a:rPr lang="en-US" sz="3600"/>
               <a:t>1280D Protein Embedding</a:t>
             </a:r>
           </a:p>
@@ -3679,8 +4166,8 @@
         </p:nvSpPr>
         <p:spPr>
           <a:xfrm>
-            <a:off x="6762498" y="9879948"/>
-            <a:ext cx="2956333" cy="1323439"/>
+            <a:off x="7038354" y="10160675"/>
+            <a:ext cx="4164444" cy="707886"/>
           </a:xfrm>
           <a:prstGeom prst="rect">
             <a:avLst/>
@@ -3695,7 +4182,7 @@
           <a:p>
             <a:pPr algn="ctr"/>
             <a:r>
-              <a:rPr lang="en-US" sz="4000" dirty="0"/>
+              <a:rPr lang="en-US" sz="4000"/>
               <a:t>T-Scale Lookup</a:t>
             </a:r>
           </a:p>
@@ -3715,8 +4202,8 @@
         </p:nvSpPr>
         <p:spPr>
           <a:xfrm>
-            <a:off x="11704622" y="9865381"/>
-            <a:ext cx="2956333" cy="1323439"/>
+            <a:off x="13398029" y="9604290"/>
+            <a:ext cx="3574422" cy="1323439"/>
           </a:xfrm>
           <a:prstGeom prst="rect">
             <a:avLst/>
@@ -3731,7 +4218,7 @@
           <a:p>
             <a:pPr algn="ctr"/>
             <a:r>
-              <a:rPr lang="en-US" sz="4000" dirty="0"/>
+              <a:rPr lang="en-US" sz="4000"/>
               <a:t>Statistical Pooling</a:t>
             </a:r>
           </a:p>
@@ -3759,7 +4246,7 @@
         </p:blipFill>
         <p:spPr>
           <a:xfrm rot="10800000">
-            <a:off x="9970093" y="10417629"/>
+            <a:off x="11517135" y="10102646"/>
             <a:ext cx="1643742" cy="1643742"/>
           </a:xfrm>
           <a:prstGeom prst="rect">
@@ -3789,7 +4276,7 @@
         </p:blipFill>
         <p:spPr>
           <a:xfrm rot="10800000">
-            <a:off x="14548378" y="11071507"/>
+            <a:off x="17597773" y="10672934"/>
             <a:ext cx="2459920" cy="503165"/>
           </a:xfrm>
           <a:prstGeom prst="rect">
@@ -3811,8 +4298,8 @@
         </p:nvSpPr>
         <p:spPr>
           <a:xfrm>
-            <a:off x="13492338" y="11753306"/>
-            <a:ext cx="4572000" cy="1200329"/>
+            <a:off x="16635937" y="11377871"/>
+            <a:ext cx="4572000" cy="646331"/>
           </a:xfrm>
           <a:prstGeom prst="rect">
             <a:avLst/>
@@ -3827,90 +4314,12 @@
           <a:p>
             <a:pPr algn="ctr"/>
             <a:r>
-              <a:rPr lang="en-US" sz="3600" dirty="0"/>
-              <a:t>20D T-Scale protein vector</a:t>
-            </a:r>
-          </a:p>
-        </p:txBody>
-      </p:sp>
-      <p:cxnSp>
-        <p:nvCxnSpPr>
-          <p:cNvPr id="77" name="Straight Connector 76">
-            <a:extLst>
-              <a:ext uri="{FF2B5EF4-FFF2-40B4-BE49-F238E27FC236}">
-                <a16:creationId xmlns:a16="http://schemas.microsoft.com/office/drawing/2014/main" id="{49E80798-D4E8-5F24-188C-7399CB5951D6}"/>
-              </a:ext>
-            </a:extLst>
-          </p:cNvPr>
-          <p:cNvCxnSpPr/>
-          <p:nvPr/>
-        </p:nvCxnSpPr>
-        <p:spPr>
-          <a:xfrm>
-            <a:off x="6433636" y="12952800"/>
-            <a:ext cx="634212" cy="0"/>
-          </a:xfrm>
-          <a:prstGeom prst="line">
-            <a:avLst/>
-          </a:prstGeom>
-          <a:ln w="76200"/>
-        </p:spPr>
-        <p:style>
-          <a:lnRef idx="2">
-            <a:schemeClr val="dk1"/>
-          </a:lnRef>
-          <a:fillRef idx="0">
-            <a:schemeClr val="dk1"/>
-          </a:fillRef>
-          <a:effectRef idx="1">
-            <a:schemeClr val="dk1"/>
-          </a:effectRef>
-          <a:fontRef idx="minor">
-            <a:schemeClr val="tx1"/>
-          </a:fontRef>
-        </p:style>
-      </p:cxnSp>
-      <p:cxnSp>
-        <p:nvCxnSpPr>
-          <p:cNvPr id="86" name="Straight Arrow Connector 85">
-            <a:extLst>
-              <a:ext uri="{FF2B5EF4-FFF2-40B4-BE49-F238E27FC236}">
-                <a16:creationId xmlns:a16="http://schemas.microsoft.com/office/drawing/2014/main" id="{FB45087A-EECA-7B11-D407-19B50883497F}"/>
-              </a:ext>
-            </a:extLst>
-          </p:cNvPr>
-          <p:cNvCxnSpPr>
-            <a:cxnSpLocks/>
-          </p:cNvCxnSpPr>
-          <p:nvPr/>
-        </p:nvCxnSpPr>
-        <p:spPr>
-          <a:xfrm>
-            <a:off x="7037727" y="8188138"/>
-            <a:ext cx="2614273" cy="0"/>
-          </a:xfrm>
-          <a:prstGeom prst="straightConnector1">
-            <a:avLst/>
-          </a:prstGeom>
-          <a:ln w="76200">
-            <a:tailEnd type="triangle"/>
-          </a:ln>
-        </p:spPr>
-        <p:style>
-          <a:lnRef idx="2">
-            <a:schemeClr val="dk1"/>
-          </a:lnRef>
-          <a:fillRef idx="0">
-            <a:schemeClr val="dk1"/>
-          </a:fillRef>
-          <a:effectRef idx="1">
-            <a:schemeClr val="dk1"/>
-          </a:effectRef>
-          <a:fontRef idx="minor">
-            <a:schemeClr val="tx1"/>
-          </a:fontRef>
-        </p:style>
-      </p:cxnSp>
+              <a:rPr lang="en-US" sz="3600"/>
+              <a:t>20D protein vector</a:t>
+            </a:r>
+          </a:p>
+        </p:txBody>
+      </p:sp>
       <p:cxnSp>
         <p:nvCxnSpPr>
           <p:cNvPr id="89" name="Straight Arrow Connector 88">
@@ -3927,8 +4336,8 @@
         </p:nvCxnSpPr>
         <p:spPr>
           <a:xfrm>
-            <a:off x="12298024" y="16389163"/>
-            <a:ext cx="2614273" cy="0"/>
+            <a:off x="12406902" y="16412675"/>
+            <a:ext cx="4683132" cy="0"/>
           </a:xfrm>
           <a:prstGeom prst="straightConnector1">
             <a:avLst/>
@@ -3968,8 +4377,8 @@
         </p:nvCxnSpPr>
         <p:spPr>
           <a:xfrm>
-            <a:off x="11793199" y="8170209"/>
-            <a:ext cx="2614273" cy="0"/>
+            <a:off x="12313283" y="8199423"/>
+            <a:ext cx="2815715" cy="0"/>
           </a:xfrm>
           <a:prstGeom prst="straightConnector1">
             <a:avLst/>
@@ -4009,8 +4418,8 @@
         </p:nvCxnSpPr>
         <p:spPr>
           <a:xfrm>
-            <a:off x="7065436" y="11319265"/>
-            <a:ext cx="2614273" cy="0"/>
+            <a:off x="7065436" y="10924517"/>
+            <a:ext cx="4165272" cy="0"/>
           </a:xfrm>
           <a:prstGeom prst="straightConnector1">
             <a:avLst/>
@@ -4050,8 +4459,8 @@
         </p:nvCxnSpPr>
         <p:spPr>
           <a:xfrm>
-            <a:off x="11748273" y="11263847"/>
-            <a:ext cx="2614273" cy="0"/>
+            <a:off x="13409163" y="10924517"/>
+            <a:ext cx="3680871" cy="0"/>
           </a:xfrm>
           <a:prstGeom prst="straightConnector1">
             <a:avLst/>
@@ -4103,7 +4512,7 @@
         </p:blipFill>
         <p:spPr>
           <a:xfrm>
-            <a:off x="10737369" y="13475695"/>
+            <a:off x="10630165" y="12883170"/>
             <a:ext cx="1643742" cy="1643742"/>
           </a:xfrm>
           <a:prstGeom prst="rect">
@@ -4139,7 +4548,7 @@
         </p:blipFill>
         <p:spPr>
           <a:xfrm>
-            <a:off x="15026258" y="13443093"/>
+            <a:off x="15050252" y="12860662"/>
             <a:ext cx="1643741" cy="1643741"/>
           </a:xfrm>
           <a:prstGeom prst="rect">
@@ -4163,7 +4572,7 @@
         </p:nvCxnSpPr>
         <p:spPr>
           <a:xfrm>
-            <a:off x="7048503" y="14314713"/>
+            <a:off x="7048503" y="13660928"/>
             <a:ext cx="3634312" cy="0"/>
           </a:xfrm>
           <a:prstGeom prst="straightConnector1">
@@ -4202,7 +4611,7 @@
         </p:nvSpPr>
         <p:spPr>
           <a:xfrm>
-            <a:off x="7008965" y="12991274"/>
+            <a:off x="7079670" y="12319278"/>
             <a:ext cx="3627476" cy="1323439"/>
           </a:xfrm>
           <a:prstGeom prst="rect">
@@ -4218,7 +4627,7 @@
           <a:p>
             <a:pPr algn="ctr"/>
             <a:r>
-              <a:rPr lang="en-US" sz="4000" dirty="0"/>
+              <a:rPr lang="en-US" sz="4000"/>
               <a:t>SMILES Representation</a:t>
             </a:r>
           </a:p>
@@ -4240,7 +4649,7 @@
         </p:nvCxnSpPr>
         <p:spPr>
           <a:xfrm>
-            <a:off x="12343696" y="14304758"/>
+            <a:off x="12339005" y="13674337"/>
             <a:ext cx="2614273" cy="0"/>
           </a:xfrm>
           <a:prstGeom prst="straightConnector1">
@@ -4279,7 +4688,7 @@
         </p:nvSpPr>
         <p:spPr>
           <a:xfrm>
-            <a:off x="12193719" y="12927558"/>
+            <a:off x="12126480" y="12343021"/>
             <a:ext cx="2956333" cy="1323439"/>
           </a:xfrm>
           <a:prstGeom prst="rect">
@@ -4295,7 +4704,7 @@
           <a:p>
             <a:pPr algn="ctr"/>
             <a:r>
-              <a:rPr lang="en-US" sz="4000" dirty="0"/>
+              <a:rPr lang="en-US" sz="4000"/>
               <a:t>RNN Encoder</a:t>
             </a:r>
           </a:p>
@@ -4317,8 +4726,8 @@
         </p:nvCxnSpPr>
         <p:spPr>
           <a:xfrm>
-            <a:off x="16627469" y="14355022"/>
-            <a:ext cx="2614273" cy="0"/>
+            <a:off x="16806073" y="13607025"/>
+            <a:ext cx="2841804" cy="0"/>
           </a:xfrm>
           <a:prstGeom prst="straightConnector1">
             <a:avLst/>
@@ -4356,8 +4765,8 @@
         </p:nvSpPr>
         <p:spPr>
           <a:xfrm>
-            <a:off x="16510538" y="13012618"/>
-            <a:ext cx="2956333" cy="1323439"/>
+            <a:off x="16568663" y="12241863"/>
+            <a:ext cx="3197728" cy="1323439"/>
           </a:xfrm>
           <a:prstGeom prst="rect">
             <a:avLst/>
@@ -4372,7 +4781,7 @@
           <a:p>
             <a:pPr algn="ctr"/>
             <a:r>
-              <a:rPr lang="en-US" sz="4000" dirty="0"/>
+              <a:rPr lang="en-US" sz="4000"/>
               <a:t>Feature Vector</a:t>
             </a:r>
           </a:p>
@@ -4400,7 +4809,7 @@
         </p:blipFill>
         <p:spPr>
           <a:xfrm>
-            <a:off x="19597397" y="14084474"/>
+            <a:off x="19991572" y="13337936"/>
             <a:ext cx="2459920" cy="503165"/>
           </a:xfrm>
           <a:prstGeom prst="rect">
@@ -4422,8 +4831,8 @@
         </p:nvSpPr>
         <p:spPr>
           <a:xfrm>
-            <a:off x="6984171" y="15001976"/>
-            <a:ext cx="3627476" cy="1323439"/>
+            <a:off x="7073607" y="15072314"/>
+            <a:ext cx="3538039" cy="1323439"/>
           </a:xfrm>
           <a:prstGeom prst="rect">
             <a:avLst/>
@@ -4438,53 +4847,12 @@
           <a:p>
             <a:pPr algn="ctr"/>
             <a:r>
-              <a:rPr lang="en-US" sz="4000" dirty="0"/>
+              <a:rPr lang="en-US" sz="4000"/>
               <a:t>Experimental Features</a:t>
             </a:r>
           </a:p>
         </p:txBody>
       </p:sp>
-      <p:cxnSp>
-        <p:nvCxnSpPr>
-          <p:cNvPr id="120" name="Straight Arrow Connector 119">
-            <a:extLst>
-              <a:ext uri="{FF2B5EF4-FFF2-40B4-BE49-F238E27FC236}">
-                <a16:creationId xmlns:a16="http://schemas.microsoft.com/office/drawing/2014/main" id="{FF4EEC87-8F20-F2A0-41FA-9975413D870A}"/>
-              </a:ext>
-            </a:extLst>
-          </p:cNvPr>
-          <p:cNvCxnSpPr>
-            <a:cxnSpLocks/>
-          </p:cNvCxnSpPr>
-          <p:nvPr/>
-        </p:nvCxnSpPr>
-        <p:spPr>
-          <a:xfrm>
-            <a:off x="7030740" y="16397322"/>
-            <a:ext cx="3546092" cy="0"/>
-          </a:xfrm>
-          <a:prstGeom prst="straightConnector1">
-            <a:avLst/>
-          </a:prstGeom>
-          <a:ln w="76200">
-            <a:tailEnd type="triangle"/>
-          </a:ln>
-        </p:spPr>
-        <p:style>
-          <a:lnRef idx="2">
-            <a:schemeClr val="dk1"/>
-          </a:lnRef>
-          <a:fillRef idx="0">
-            <a:schemeClr val="dk1"/>
-          </a:fillRef>
-          <a:effectRef idx="1">
-            <a:schemeClr val="dk1"/>
-          </a:effectRef>
-          <a:fontRef idx="minor">
-            <a:schemeClr val="tx1"/>
-          </a:fontRef>
-        </p:style>
-      </p:cxnSp>
       <p:pic>
         <p:nvPicPr>
           <p:cNvPr id="125" name="Graphic 124" descr="Microscope with solid fill">
@@ -4543,7 +4911,7 @@
         </p:blipFill>
         <p:spPr>
           <a:xfrm>
-            <a:off x="15368297" y="16141874"/>
+            <a:off x="17557444" y="16176445"/>
             <a:ext cx="2459920" cy="503165"/>
           </a:xfrm>
           <a:prstGeom prst="rect">
@@ -4567,7 +4935,7 @@
         </p:nvCxnSpPr>
         <p:spPr>
           <a:xfrm>
-            <a:off x="16584274" y="8188138"/>
+            <a:off x="17400722" y="8199423"/>
             <a:ext cx="2614273" cy="0"/>
           </a:xfrm>
           <a:prstGeom prst="straightConnector1">
@@ -4606,7 +4974,7 @@
         </p:nvSpPr>
         <p:spPr>
           <a:xfrm>
-            <a:off x="11960721" y="15453753"/>
+            <a:off x="13026738" y="15659856"/>
             <a:ext cx="3288878" cy="707886"/>
           </a:xfrm>
           <a:prstGeom prst="rect">
@@ -4622,129 +4990,12 @@
           <a:p>
             <a:pPr algn="ctr"/>
             <a:r>
-              <a:rPr lang="en-US" sz="4000" dirty="0"/>
+              <a:rPr lang="en-US" sz="4000"/>
               <a:t>Normalization</a:t>
             </a:r>
           </a:p>
         </p:txBody>
       </p:sp>
-      <p:cxnSp>
-        <p:nvCxnSpPr>
-          <p:cNvPr id="137" name="Straight Connector 136">
-            <a:extLst>
-              <a:ext uri="{FF2B5EF4-FFF2-40B4-BE49-F238E27FC236}">
-                <a16:creationId xmlns:a16="http://schemas.microsoft.com/office/drawing/2014/main" id="{4F6BB34D-C8BE-30C4-95E1-3D8E25949670}"/>
-              </a:ext>
-            </a:extLst>
-          </p:cNvPr>
-          <p:cNvCxnSpPr>
-            <a:cxnSpLocks/>
-          </p:cNvCxnSpPr>
-          <p:nvPr/>
-        </p:nvCxnSpPr>
-        <p:spPr>
-          <a:xfrm>
-            <a:off x="7064608" y="8170209"/>
-            <a:ext cx="828" cy="8257819"/>
-          </a:xfrm>
-          <a:prstGeom prst="line">
-            <a:avLst/>
-          </a:prstGeom>
-          <a:ln w="76200"/>
-        </p:spPr>
-        <p:style>
-          <a:lnRef idx="2">
-            <a:schemeClr val="dk1"/>
-          </a:lnRef>
-          <a:fillRef idx="0">
-            <a:schemeClr val="dk1"/>
-          </a:fillRef>
-          <a:effectRef idx="1">
-            <a:schemeClr val="dk1"/>
-          </a:effectRef>
-          <a:fontRef idx="minor">
-            <a:schemeClr val="tx1"/>
-          </a:fontRef>
-        </p:style>
-      </p:cxnSp>
-      <p:cxnSp>
-        <p:nvCxnSpPr>
-          <p:cNvPr id="141" name="Straight Connector 140">
-            <a:extLst>
-              <a:ext uri="{FF2B5EF4-FFF2-40B4-BE49-F238E27FC236}">
-                <a16:creationId xmlns:a16="http://schemas.microsoft.com/office/drawing/2014/main" id="{469D9899-91C7-F6E7-A2A6-D97E00808839}"/>
-              </a:ext>
-            </a:extLst>
-          </p:cNvPr>
-          <p:cNvCxnSpPr>
-            <a:cxnSpLocks/>
-          </p:cNvCxnSpPr>
-          <p:nvPr/>
-        </p:nvCxnSpPr>
-        <p:spPr>
-          <a:xfrm>
-            <a:off x="23722861" y="8170209"/>
-            <a:ext cx="828" cy="8257819"/>
-          </a:xfrm>
-          <a:prstGeom prst="line">
-            <a:avLst/>
-          </a:prstGeom>
-          <a:ln w="76200"/>
-        </p:spPr>
-        <p:style>
-          <a:lnRef idx="2">
-            <a:schemeClr val="dk1"/>
-          </a:lnRef>
-          <a:fillRef idx="0">
-            <a:schemeClr val="dk1"/>
-          </a:fillRef>
-          <a:effectRef idx="1">
-            <a:schemeClr val="dk1"/>
-          </a:effectRef>
-          <a:fontRef idx="minor">
-            <a:schemeClr val="tx1"/>
-          </a:fontRef>
-        </p:style>
-      </p:cxnSp>
-      <p:cxnSp>
-        <p:nvCxnSpPr>
-          <p:cNvPr id="142" name="Straight Connector 141">
-            <a:extLst>
-              <a:ext uri="{FF2B5EF4-FFF2-40B4-BE49-F238E27FC236}">
-                <a16:creationId xmlns:a16="http://schemas.microsoft.com/office/drawing/2014/main" id="{D1C716F9-A63A-43BD-D5F5-B7ABD9A37659}"/>
-              </a:ext>
-            </a:extLst>
-          </p:cNvPr>
-          <p:cNvCxnSpPr>
-            <a:cxnSpLocks/>
-          </p:cNvCxnSpPr>
-          <p:nvPr/>
-        </p:nvCxnSpPr>
-        <p:spPr>
-          <a:xfrm flipH="1">
-            <a:off x="18332460" y="16397322"/>
-            <a:ext cx="5390401" cy="30706"/>
-          </a:xfrm>
-          <a:prstGeom prst="line">
-            <a:avLst/>
-          </a:prstGeom>
-          <a:ln w="76200"/>
-        </p:spPr>
-        <p:style>
-          <a:lnRef idx="2">
-            <a:schemeClr val="dk1"/>
-          </a:lnRef>
-          <a:fillRef idx="0">
-            <a:schemeClr val="dk1"/>
-          </a:fillRef>
-          <a:effectRef idx="1">
-            <a:schemeClr val="dk1"/>
-          </a:effectRef>
-          <a:fontRef idx="minor">
-            <a:schemeClr val="tx1"/>
-          </a:fontRef>
-        </p:style>
-      </p:cxnSp>
       <p:cxnSp>
         <p:nvCxnSpPr>
           <p:cNvPr id="145" name="Straight Connector 144">
@@ -4761,8 +5012,8 @@
         </p:nvCxnSpPr>
         <p:spPr>
           <a:xfrm flipH="1" flipV="1">
-            <a:off x="22187843" y="14345419"/>
-            <a:ext cx="1535018" cy="9603"/>
+            <a:off x="22854722" y="13575408"/>
+            <a:ext cx="903999" cy="28222"/>
           </a:xfrm>
           <a:prstGeom prst="line">
             <a:avLst/>
@@ -4799,9 +5050,9 @@
           <p:nvPr/>
         </p:nvCxnSpPr>
         <p:spPr>
-          <a:xfrm flipH="1">
-            <a:off x="17385462" y="11319265"/>
-            <a:ext cx="6337399" cy="0"/>
+          <a:xfrm flipH="1" flipV="1">
+            <a:off x="20367154" y="10916717"/>
+            <a:ext cx="3391567" cy="15600"/>
           </a:xfrm>
           <a:prstGeom prst="line">
             <a:avLst/>
@@ -4823,86 +5074,6 @@
           </a:fontRef>
         </p:style>
       </p:cxnSp>
-      <p:cxnSp>
-        <p:nvCxnSpPr>
-          <p:cNvPr id="149" name="Straight Connector 148">
-            <a:extLst>
-              <a:ext uri="{FF2B5EF4-FFF2-40B4-BE49-F238E27FC236}">
-                <a16:creationId xmlns:a16="http://schemas.microsoft.com/office/drawing/2014/main" id="{22647B2F-8272-9CE6-310F-10CDF7F45156}"/>
-              </a:ext>
-            </a:extLst>
-          </p:cNvPr>
-          <p:cNvCxnSpPr>
-            <a:cxnSpLocks/>
-          </p:cNvCxnSpPr>
-          <p:nvPr/>
-        </p:nvCxnSpPr>
-        <p:spPr>
-          <a:xfrm flipH="1">
-            <a:off x="22093177" y="8170209"/>
-            <a:ext cx="1665544" cy="0"/>
-          </a:xfrm>
-          <a:prstGeom prst="line">
-            <a:avLst/>
-          </a:prstGeom>
-          <a:ln w="76200"/>
-        </p:spPr>
-        <p:style>
-          <a:lnRef idx="2">
-            <a:schemeClr val="dk1"/>
-          </a:lnRef>
-          <a:fillRef idx="0">
-            <a:schemeClr val="dk1"/>
-          </a:fillRef>
-          <a:effectRef idx="1">
-            <a:schemeClr val="dk1"/>
-          </a:effectRef>
-          <a:fontRef idx="minor">
-            <a:schemeClr val="tx1"/>
-          </a:fontRef>
-        </p:style>
-      </p:cxnSp>
-      <p:cxnSp>
-        <p:nvCxnSpPr>
-          <p:cNvPr id="151" name="Straight Arrow Connector 150">
-            <a:extLst>
-              <a:ext uri="{FF2B5EF4-FFF2-40B4-BE49-F238E27FC236}">
-                <a16:creationId xmlns:a16="http://schemas.microsoft.com/office/drawing/2014/main" id="{F6C28FE1-C106-1432-DACD-95189EC16388}"/>
-              </a:ext>
-            </a:extLst>
-          </p:cNvPr>
-          <p:cNvCxnSpPr>
-            <a:cxnSpLocks/>
-          </p:cNvCxnSpPr>
-          <p:nvPr/>
-        </p:nvCxnSpPr>
-        <p:spPr>
-          <a:xfrm>
-            <a:off x="23758721" y="12952800"/>
-            <a:ext cx="3465353" cy="0"/>
-          </a:xfrm>
-          <a:prstGeom prst="straightConnector1">
-            <a:avLst/>
-          </a:prstGeom>
-          <a:ln w="76200">
-            <a:tailEnd type="triangle"/>
-          </a:ln>
-        </p:spPr>
-        <p:style>
-          <a:lnRef idx="2">
-            <a:schemeClr val="dk1"/>
-          </a:lnRef>
-          <a:fillRef idx="0">
-            <a:schemeClr val="dk1"/>
-          </a:fillRef>
-          <a:effectRef idx="1">
-            <a:schemeClr val="dk1"/>
-          </a:effectRef>
-          <a:fontRef idx="minor">
-            <a:schemeClr val="tx1"/>
-          </a:fontRef>
-        </p:style>
-      </p:cxnSp>
       <p:sp>
         <p:nvSpPr>
           <p:cNvPr id="152" name="TextBox 151">
@@ -4933,7 +5104,7 @@
           <a:p>
             <a:pPr algn="ctr"/>
             <a:r>
-              <a:rPr lang="en-US" sz="3600" dirty="0"/>
+              <a:rPr lang="en-US" sz="3600"/>
               <a:t>Concatenation</a:t>
             </a:r>
           </a:p>
@@ -4961,7 +5132,7 @@
         </p:blipFill>
         <p:spPr>
           <a:xfrm rot="5400000">
-            <a:off x="25015185" y="11941707"/>
+            <a:off x="24705533" y="12588038"/>
             <a:ext cx="5535716" cy="474490"/>
           </a:xfrm>
           <a:prstGeom prst="rect">
@@ -4985,7 +5156,7 @@
         </p:nvCxnSpPr>
         <p:spPr>
           <a:xfrm>
-            <a:off x="28660330" y="12897543"/>
+            <a:off x="27989770" y="12897543"/>
             <a:ext cx="3465353" cy="0"/>
           </a:xfrm>
           <a:prstGeom prst="straightConnector1">
@@ -5024,7 +5195,7 @@
         </p:nvSpPr>
         <p:spPr>
           <a:xfrm>
-            <a:off x="28805745" y="11674695"/>
+            <a:off x="28135185" y="11674695"/>
             <a:ext cx="3259369" cy="1200329"/>
           </a:xfrm>
           <a:prstGeom prst="rect">
@@ -5040,7 +5211,7 @@
           <a:p>
             <a:pPr algn="ctr"/>
             <a:r>
-              <a:rPr lang="en-US" sz="3600" dirty="0"/>
+              <a:rPr lang="en-US" sz="3600"/>
               <a:t>Machine Learning Model</a:t>
             </a:r>
           </a:p>
@@ -5074,7 +5245,7 @@
         </p:blipFill>
         <p:spPr>
           <a:xfrm>
-            <a:off x="32610652" y="11890353"/>
+            <a:off x="31940092" y="11890353"/>
             <a:ext cx="1923143" cy="1923143"/>
           </a:xfrm>
           <a:prstGeom prst="rect">
@@ -5082,6 +5253,185 @@
           </a:prstGeom>
         </p:spPr>
       </p:pic>
+      <p:cxnSp>
+        <p:nvCxnSpPr>
+          <p:cNvPr id="24" name="Connector: Elbow 23">
+            <a:extLst>
+              <a:ext uri="{FF2B5EF4-FFF2-40B4-BE49-F238E27FC236}">
+                <a16:creationId xmlns:a16="http://schemas.microsoft.com/office/drawing/2014/main" id="{F21963F7-4264-0AF0-6DF9-039AF8DDDC7F}"/>
+              </a:ext>
+            </a:extLst>
+          </p:cNvPr>
+          <p:cNvCxnSpPr>
+            <a:cxnSpLocks/>
+            <a:endCxn id="42" idx="1"/>
+          </p:cNvCxnSpPr>
+          <p:nvPr/>
+        </p:nvCxnSpPr>
+        <p:spPr>
+          <a:xfrm flipV="1">
+            <a:off x="6414291" y="8199424"/>
+            <a:ext cx="4164438" cy="3979528"/>
+          </a:xfrm>
+          <a:prstGeom prst="bentConnector3">
+            <a:avLst>
+              <a:gd name="adj1" fmla="val 14868"/>
+            </a:avLst>
+          </a:prstGeom>
+          <a:ln w="76200">
+            <a:solidFill>
+              <a:schemeClr val="tx1"/>
+            </a:solidFill>
+            <a:tailEnd type="triangle"/>
+          </a:ln>
+        </p:spPr>
+        <p:style>
+          <a:lnRef idx="2">
+            <a:schemeClr val="accent1"/>
+          </a:lnRef>
+          <a:fillRef idx="0">
+            <a:schemeClr val="accent1"/>
+          </a:fillRef>
+          <a:effectRef idx="1">
+            <a:schemeClr val="accent1"/>
+          </a:effectRef>
+          <a:fontRef idx="minor">
+            <a:schemeClr val="tx1"/>
+          </a:fontRef>
+        </p:style>
+      </p:cxnSp>
+      <p:cxnSp>
+        <p:nvCxnSpPr>
+          <p:cNvPr id="29" name="Connector: Elbow 28">
+            <a:extLst>
+              <a:ext uri="{FF2B5EF4-FFF2-40B4-BE49-F238E27FC236}">
+                <a16:creationId xmlns:a16="http://schemas.microsoft.com/office/drawing/2014/main" id="{3FAC87F6-44FC-5AD4-FD50-635C8271473B}"/>
+              </a:ext>
+            </a:extLst>
+          </p:cNvPr>
+          <p:cNvCxnSpPr>
+            <a:cxnSpLocks/>
+          </p:cNvCxnSpPr>
+          <p:nvPr/>
+        </p:nvCxnSpPr>
+        <p:spPr>
+          <a:xfrm>
+            <a:off x="6414291" y="12189112"/>
+            <a:ext cx="4303989" cy="4223563"/>
+          </a:xfrm>
+          <a:prstGeom prst="bentConnector3">
+            <a:avLst>
+              <a:gd name="adj1" fmla="val 14450"/>
+            </a:avLst>
+          </a:prstGeom>
+          <a:ln w="76200">
+            <a:solidFill>
+              <a:schemeClr val="tx1"/>
+            </a:solidFill>
+            <a:tailEnd type="triangle"/>
+          </a:ln>
+        </p:spPr>
+        <p:style>
+          <a:lnRef idx="2">
+            <a:schemeClr val="accent1"/>
+          </a:lnRef>
+          <a:fillRef idx="0">
+            <a:schemeClr val="accent1"/>
+          </a:fillRef>
+          <a:effectRef idx="1">
+            <a:schemeClr val="accent1"/>
+          </a:effectRef>
+          <a:fontRef idx="minor">
+            <a:schemeClr val="tx1"/>
+          </a:fontRef>
+        </p:style>
+      </p:cxnSp>
+      <p:cxnSp>
+        <p:nvCxnSpPr>
+          <p:cNvPr id="40" name="Connector: Elbow 39">
+            <a:extLst>
+              <a:ext uri="{FF2B5EF4-FFF2-40B4-BE49-F238E27FC236}">
+                <a16:creationId xmlns:a16="http://schemas.microsoft.com/office/drawing/2014/main" id="{1317CB07-B9F1-FA0E-0460-D3DD2DCE7A48}"/>
+              </a:ext>
+            </a:extLst>
+          </p:cNvPr>
+          <p:cNvCxnSpPr>
+            <a:cxnSpLocks/>
+          </p:cNvCxnSpPr>
+          <p:nvPr/>
+        </p:nvCxnSpPr>
+        <p:spPr>
+          <a:xfrm flipV="1">
+            <a:off x="20545072" y="12921638"/>
+            <a:ext cx="6294817" cy="3491037"/>
+          </a:xfrm>
+          <a:prstGeom prst="bentConnector3">
+            <a:avLst>
+              <a:gd name="adj1" fmla="val 50552"/>
+            </a:avLst>
+          </a:prstGeom>
+          <a:ln w="76200">
+            <a:tailEnd type="triangle"/>
+          </a:ln>
+        </p:spPr>
+        <p:style>
+          <a:lnRef idx="2">
+            <a:schemeClr val="dk1"/>
+          </a:lnRef>
+          <a:fillRef idx="0">
+            <a:schemeClr val="dk1"/>
+          </a:fillRef>
+          <a:effectRef idx="1">
+            <a:schemeClr val="dk1"/>
+          </a:effectRef>
+          <a:fontRef idx="minor">
+            <a:schemeClr val="tx1"/>
+          </a:fontRef>
+        </p:style>
+      </p:cxnSp>
+      <p:cxnSp>
+        <p:nvCxnSpPr>
+          <p:cNvPr id="48" name="Connector: Elbow 47">
+            <a:extLst>
+              <a:ext uri="{FF2B5EF4-FFF2-40B4-BE49-F238E27FC236}">
+                <a16:creationId xmlns:a16="http://schemas.microsoft.com/office/drawing/2014/main" id="{350F9C43-F513-AA2B-A16C-B87F28165869}"/>
+              </a:ext>
+            </a:extLst>
+          </p:cNvPr>
+          <p:cNvCxnSpPr>
+            <a:cxnSpLocks/>
+          </p:cNvCxnSpPr>
+          <p:nvPr/>
+        </p:nvCxnSpPr>
+        <p:spPr>
+          <a:xfrm>
+            <a:off x="22912680" y="8168943"/>
+            <a:ext cx="3931920" cy="4757880"/>
+          </a:xfrm>
+          <a:prstGeom prst="bentConnector3">
+            <a:avLst>
+              <a:gd name="adj1" fmla="val 20725"/>
+            </a:avLst>
+          </a:prstGeom>
+          <a:ln w="76200">
+            <a:tailEnd type="triangle"/>
+          </a:ln>
+        </p:spPr>
+        <p:style>
+          <a:lnRef idx="2">
+            <a:schemeClr val="dk1"/>
+          </a:lnRef>
+          <a:fillRef idx="0">
+            <a:schemeClr val="dk1"/>
+          </a:fillRef>
+          <a:effectRef idx="1">
+            <a:schemeClr val="dk1"/>
+          </a:effectRef>
+          <a:fontRef idx="minor">
+            <a:schemeClr val="tx1"/>
+          </a:fontRef>
+        </p:style>
+      </p:cxnSp>
     </p:spTree>
     <p:extLst>
       <p:ext uri="{BB962C8B-B14F-4D97-AF65-F5344CB8AC3E}">

--- a/Figures/2D-Explanation.pptx
+++ b/Figures/2D-Explanation.pptx
@@ -690,6 +690,7 @@
               <a:rPr lang="en-US"/>
               <a:t>Click to edit Master title style</a:t>
             </a:r>
+            <a:endParaRPr lang="en-US" dirty="0"/>
           </a:p>
         </p:txBody>
       </p:sp>
@@ -754,6 +755,7 @@
               <a:rPr lang="en-US"/>
               <a:t>Click to edit Master subtitle style</a:t>
             </a:r>
+            <a:endParaRPr lang="en-US" dirty="0"/>
           </a:p>
         </p:txBody>
       </p:sp>
@@ -774,7 +776,7 @@
           <a:p>
             <a:fld id="{3BF4720D-ACA3-604B-9172-5B77D8415C7D}" type="datetimeFigureOut">
               <a:rPr lang="en-US" smtClean="0"/>
-              <a:t>4/18/26</a:t>
+              <a:t>18/04/2026</a:t>
             </a:fld>
             <a:endParaRPr lang="en-US"/>
           </a:p>
@@ -871,6 +873,7 @@
               <a:rPr lang="en-US"/>
               <a:t>Click to edit Master title style</a:t>
             </a:r>
+            <a:endParaRPr lang="en-US" dirty="0"/>
           </a:p>
         </p:txBody>
       </p:sp>
@@ -922,6 +925,7 @@
               <a:rPr lang="en-US"/>
               <a:t>Fifth level</a:t>
             </a:r>
+            <a:endParaRPr lang="en-US" dirty="0"/>
           </a:p>
         </p:txBody>
       </p:sp>
@@ -942,7 +946,7 @@
           <a:p>
             <a:fld id="{3BF4720D-ACA3-604B-9172-5B77D8415C7D}" type="datetimeFigureOut">
               <a:rPr lang="en-US" smtClean="0"/>
-              <a:t>4/18/26</a:t>
+              <a:t>18/04/2026</a:t>
             </a:fld>
             <a:endParaRPr lang="en-US"/>
           </a:p>
@@ -1044,6 +1048,7 @@
               <a:rPr lang="en-US"/>
               <a:t>Click to edit Master title style</a:t>
             </a:r>
+            <a:endParaRPr lang="en-US" dirty="0"/>
           </a:p>
         </p:txBody>
       </p:sp>
@@ -1100,6 +1105,7 @@
               <a:rPr lang="en-US"/>
               <a:t>Fifth level</a:t>
             </a:r>
+            <a:endParaRPr lang="en-US" dirty="0"/>
           </a:p>
         </p:txBody>
       </p:sp>
@@ -1120,7 +1126,7 @@
           <a:p>
             <a:fld id="{3BF4720D-ACA3-604B-9172-5B77D8415C7D}" type="datetimeFigureOut">
               <a:rPr lang="en-US" smtClean="0"/>
-              <a:t>4/18/26</a:t>
+              <a:t>18/04/2026</a:t>
             </a:fld>
             <a:endParaRPr lang="en-US"/>
           </a:p>
@@ -1217,6 +1223,7 @@
               <a:rPr lang="en-US"/>
               <a:t>Click to edit Master title style</a:t>
             </a:r>
+            <a:endParaRPr lang="en-US" dirty="0"/>
           </a:p>
         </p:txBody>
       </p:sp>
@@ -1268,6 +1275,7 @@
               <a:rPr lang="en-US"/>
               <a:t>Fifth level</a:t>
             </a:r>
+            <a:endParaRPr lang="en-US" dirty="0"/>
           </a:p>
         </p:txBody>
       </p:sp>
@@ -1288,7 +1296,7 @@
           <a:p>
             <a:fld id="{3BF4720D-ACA3-604B-9172-5B77D8415C7D}" type="datetimeFigureOut">
               <a:rPr lang="en-US" smtClean="0"/>
-              <a:t>4/18/26</a:t>
+              <a:t>18/04/2026</a:t>
             </a:fld>
             <a:endParaRPr lang="en-US"/>
           </a:p>
@@ -1394,6 +1402,7 @@
               <a:rPr lang="en-US"/>
               <a:t>Click to edit Master title style</a:t>
             </a:r>
+            <a:endParaRPr lang="en-US" dirty="0"/>
           </a:p>
         </p:txBody>
       </p:sp>
@@ -1533,7 +1542,7 @@
           <a:p>
             <a:fld id="{3BF4720D-ACA3-604B-9172-5B77D8415C7D}" type="datetimeFigureOut">
               <a:rPr lang="en-US" smtClean="0"/>
-              <a:t>4/18/26</a:t>
+              <a:t>18/04/2026</a:t>
             </a:fld>
             <a:endParaRPr lang="en-US"/>
           </a:p>
@@ -1630,6 +1639,7 @@
               <a:rPr lang="en-US"/>
               <a:t>Click to edit Master title style</a:t>
             </a:r>
+            <a:endParaRPr lang="en-US" dirty="0"/>
           </a:p>
         </p:txBody>
       </p:sp>
@@ -1686,6 +1696,7 @@
               <a:rPr lang="en-US"/>
               <a:t>Fifth level</a:t>
             </a:r>
+            <a:endParaRPr lang="en-US" dirty="0"/>
           </a:p>
         </p:txBody>
       </p:sp>
@@ -1742,6 +1753,7 @@
               <a:rPr lang="en-US"/>
               <a:t>Fifth level</a:t>
             </a:r>
+            <a:endParaRPr lang="en-US" dirty="0"/>
           </a:p>
         </p:txBody>
       </p:sp>
@@ -1762,7 +1774,7 @@
           <a:p>
             <a:fld id="{3BF4720D-ACA3-604B-9172-5B77D8415C7D}" type="datetimeFigureOut">
               <a:rPr lang="en-US" smtClean="0"/>
-              <a:t>4/18/26</a:t>
+              <a:t>18/04/2026</a:t>
             </a:fld>
             <a:endParaRPr lang="en-US"/>
           </a:p>
@@ -1864,6 +1876,7 @@
               <a:rPr lang="en-US"/>
               <a:t>Click to edit Master title style</a:t>
             </a:r>
+            <a:endParaRPr lang="en-US" dirty="0"/>
           </a:p>
         </p:txBody>
       </p:sp>
@@ -1985,6 +1998,7 @@
               <a:rPr lang="en-US"/>
               <a:t>Fifth level</a:t>
             </a:r>
+            <a:endParaRPr lang="en-US" dirty="0"/>
           </a:p>
         </p:txBody>
       </p:sp>
@@ -2106,6 +2120,7 @@
               <a:rPr lang="en-US"/>
               <a:t>Fifth level</a:t>
             </a:r>
+            <a:endParaRPr lang="en-US" dirty="0"/>
           </a:p>
         </p:txBody>
       </p:sp>
@@ -2126,7 +2141,7 @@
           <a:p>
             <a:fld id="{3BF4720D-ACA3-604B-9172-5B77D8415C7D}" type="datetimeFigureOut">
               <a:rPr lang="en-US" smtClean="0"/>
-              <a:t>4/18/26</a:t>
+              <a:t>18/04/2026</a:t>
             </a:fld>
             <a:endParaRPr lang="en-US"/>
           </a:p>
@@ -2223,6 +2238,7 @@
               <a:rPr lang="en-US"/>
               <a:t>Click to edit Master title style</a:t>
             </a:r>
+            <a:endParaRPr lang="en-US" dirty="0"/>
           </a:p>
         </p:txBody>
       </p:sp>
@@ -2243,7 +2259,7 @@
           <a:p>
             <a:fld id="{3BF4720D-ACA3-604B-9172-5B77D8415C7D}" type="datetimeFigureOut">
               <a:rPr lang="en-US" smtClean="0"/>
-              <a:t>4/18/26</a:t>
+              <a:t>18/04/2026</a:t>
             </a:fld>
             <a:endParaRPr lang="en-US"/>
           </a:p>
@@ -2338,7 +2354,7 @@
           <a:p>
             <a:fld id="{3BF4720D-ACA3-604B-9172-5B77D8415C7D}" type="datetimeFigureOut">
               <a:rPr lang="en-US" smtClean="0"/>
-              <a:t>4/18/26</a:t>
+              <a:t>18/04/2026</a:t>
             </a:fld>
             <a:endParaRPr lang="en-US"/>
           </a:p>
@@ -2444,6 +2460,7 @@
               <a:rPr lang="en-US"/>
               <a:t>Click to edit Master title style</a:t>
             </a:r>
+            <a:endParaRPr lang="en-US" dirty="0"/>
           </a:p>
         </p:txBody>
       </p:sp>
@@ -2528,6 +2545,7 @@
               <a:rPr lang="en-US"/>
               <a:t>Fifth level</a:t>
             </a:r>
+            <a:endParaRPr lang="en-US" dirty="0"/>
           </a:p>
         </p:txBody>
       </p:sp>
@@ -2613,7 +2631,7 @@
           <a:p>
             <a:fld id="{3BF4720D-ACA3-604B-9172-5B77D8415C7D}" type="datetimeFigureOut">
               <a:rPr lang="en-US" smtClean="0"/>
-              <a:t>4/18/26</a:t>
+              <a:t>18/04/2026</a:t>
             </a:fld>
             <a:endParaRPr lang="en-US"/>
           </a:p>
@@ -2719,6 +2737,7 @@
               <a:rPr lang="en-US"/>
               <a:t>Click to edit Master title style</a:t>
             </a:r>
+            <a:endParaRPr lang="en-US" dirty="0"/>
           </a:p>
         </p:txBody>
       </p:sp>
@@ -2783,6 +2802,7 @@
               <a:rPr lang="en-US"/>
               <a:t>Click icon to add picture</a:t>
             </a:r>
+            <a:endParaRPr lang="en-US" dirty="0"/>
           </a:p>
         </p:txBody>
       </p:sp>
@@ -2868,7 +2888,7 @@
           <a:p>
             <a:fld id="{3BF4720D-ACA3-604B-9172-5B77D8415C7D}" type="datetimeFigureOut">
               <a:rPr lang="en-US" smtClean="0"/>
-              <a:t>4/18/26</a:t>
+              <a:t>18/04/2026</a:t>
             </a:fld>
             <a:endParaRPr lang="en-US"/>
           </a:p>
@@ -2980,6 +3000,7 @@
               <a:rPr lang="en-US"/>
               <a:t>Click to edit Master title style</a:t>
             </a:r>
+            <a:endParaRPr lang="en-US" dirty="0"/>
           </a:p>
         </p:txBody>
       </p:sp>
@@ -3041,6 +3062,7 @@
               <a:rPr lang="en-US"/>
               <a:t>Fifth level</a:t>
             </a:r>
+            <a:endParaRPr lang="en-US" dirty="0"/>
           </a:p>
         </p:txBody>
       </p:sp>
@@ -3079,7 +3101,7 @@
           <a:p>
             <a:fld id="{3BF4720D-ACA3-604B-9172-5B77D8415C7D}" type="datetimeFigureOut">
               <a:rPr lang="en-US" smtClean="0"/>
-              <a:t>4/18/26</a:t>
+              <a:t>18/04/2026</a:t>
             </a:fld>
             <a:endParaRPr lang="en-US"/>
           </a:p>
@@ -3527,7 +3549,7 @@
           <a:p>
             <a:pPr algn="ctr"/>
             <a:r>
-              <a:rPr lang="en-US" sz="4400"/>
+              <a:rPr lang="en-US" sz="4400" dirty="0"/>
               <a:t>M</a:t>
             </a:r>
           </a:p>
@@ -3579,7 +3601,7 @@
           <a:p>
             <a:pPr algn="ctr"/>
             <a:r>
-              <a:rPr lang="en-US" sz="4400"/>
+              <a:rPr lang="en-US" sz="4400" dirty="0"/>
               <a:t>V</a:t>
             </a:r>
           </a:p>
@@ -3634,7 +3656,7 @@
           <a:p>
             <a:pPr algn="ctr"/>
             <a:r>
-              <a:rPr lang="en-US" sz="4400"/>
+              <a:rPr lang="en-US" sz="4400" dirty="0"/>
               <a:t>S</a:t>
             </a:r>
           </a:p>
@@ -3691,7 +3713,7 @@
           <a:p>
             <a:pPr algn="ctr"/>
             <a:r>
-              <a:rPr lang="en-US" sz="4400"/>
+              <a:rPr lang="en-US" sz="4400" dirty="0"/>
               <a:t>…</a:t>
             </a:r>
           </a:p>
@@ -3751,7 +3773,7 @@
           <a:p>
             <a:pPr algn="ctr"/>
             <a:r>
-              <a:rPr lang="en-US" sz="4400"/>
+              <a:rPr lang="en-US" sz="4400" dirty="0"/>
               <a:t>K</a:t>
             </a:r>
           </a:p>
@@ -3787,7 +3809,7 @@
           <a:p>
             <a:pPr algn="ctr"/>
             <a:r>
-              <a:rPr lang="en-US" sz="4400"/>
+              <a:rPr lang="en-US" sz="4400" dirty="0"/>
               <a:t>2D Protein Sequence</a:t>
             </a:r>
           </a:p>
@@ -3906,7 +3928,7 @@
           <a:p>
             <a:pPr algn="ctr"/>
             <a:r>
-              <a:rPr lang="en-US" sz="4400"/>
+              <a:rPr lang="en-US" sz="4400" dirty="0"/>
               <a:t>Chromophore</a:t>
             </a:r>
           </a:p>
@@ -3942,7 +3964,7 @@
           <a:p>
             <a:pPr algn="ctr"/>
             <a:r>
-              <a:rPr lang="en-US" sz="4000"/>
+              <a:rPr lang="en-US" sz="4000" dirty="0"/>
               <a:t>ESM Encoding</a:t>
             </a:r>
           </a:p>
@@ -4014,7 +4036,7 @@
           <a:p>
             <a:pPr algn="ctr"/>
             <a:r>
-              <a:rPr lang="en-US" sz="4000"/>
+              <a:rPr lang="en-US" sz="4000" dirty="0"/>
               <a:t>Residue Embedding</a:t>
             </a:r>
           </a:p>
@@ -4050,7 +4072,7 @@
           <a:p>
             <a:pPr algn="ctr"/>
             <a:r>
-              <a:rPr lang="en-US" sz="4000"/>
+              <a:rPr lang="en-US" sz="4000" dirty="0"/>
               <a:t>Mean Pooling</a:t>
             </a:r>
           </a:p>
@@ -4146,7 +4168,7 @@
           <a:p>
             <a:pPr algn="ctr"/>
             <a:r>
-              <a:rPr lang="en-US" sz="3600"/>
+              <a:rPr lang="en-US" sz="3600" dirty="0"/>
               <a:t>1280D Protein Embedding</a:t>
             </a:r>
           </a:p>
@@ -4182,7 +4204,7 @@
           <a:p>
             <a:pPr algn="ctr"/>
             <a:r>
-              <a:rPr lang="en-US" sz="4000"/>
+              <a:rPr lang="en-US" sz="4000" dirty="0"/>
               <a:t>T-Scale Lookup</a:t>
             </a:r>
           </a:p>
@@ -4218,7 +4240,7 @@
           <a:p>
             <a:pPr algn="ctr"/>
             <a:r>
-              <a:rPr lang="en-US" sz="4000"/>
+              <a:rPr lang="en-US" sz="4000" dirty="0"/>
               <a:t>Statistical Pooling</a:t>
             </a:r>
           </a:p>
@@ -4314,7 +4336,7 @@
           <a:p>
             <a:pPr algn="ctr"/>
             <a:r>
-              <a:rPr lang="en-US" sz="3600"/>
+              <a:rPr lang="en-US" sz="3600" dirty="0"/>
               <a:t>20D protein vector</a:t>
             </a:r>
           </a:p>
@@ -4627,7 +4649,7 @@
           <a:p>
             <a:pPr algn="ctr"/>
             <a:r>
-              <a:rPr lang="en-US" sz="4000"/>
+              <a:rPr lang="en-US" sz="4000" dirty="0"/>
               <a:t>SMILES Representation</a:t>
             </a:r>
           </a:p>
@@ -4704,7 +4726,7 @@
           <a:p>
             <a:pPr algn="ctr"/>
             <a:r>
-              <a:rPr lang="en-US" sz="4000"/>
+              <a:rPr lang="en-US" sz="4000" dirty="0"/>
               <a:t>RNN Encoder</a:t>
             </a:r>
           </a:p>
@@ -4781,7 +4803,7 @@
           <a:p>
             <a:pPr algn="ctr"/>
             <a:r>
-              <a:rPr lang="en-US" sz="4000"/>
+              <a:rPr lang="en-US" sz="4000" dirty="0"/>
               <a:t>Feature Vector</a:t>
             </a:r>
           </a:p>
@@ -4847,7 +4869,7 @@
           <a:p>
             <a:pPr algn="ctr"/>
             <a:r>
-              <a:rPr lang="en-US" sz="4000"/>
+              <a:rPr lang="en-US" sz="4000" dirty="0"/>
               <a:t>Experimental Features</a:t>
             </a:r>
           </a:p>
@@ -4990,7 +5012,7 @@
           <a:p>
             <a:pPr algn="ctr"/>
             <a:r>
-              <a:rPr lang="en-US" sz="4000"/>
+              <a:rPr lang="en-US" sz="4000" dirty="0"/>
               <a:t>Normalization</a:t>
             </a:r>
           </a:p>
@@ -5104,7 +5126,7 @@
           <a:p>
             <a:pPr algn="ctr"/>
             <a:r>
-              <a:rPr lang="en-US" sz="3600"/>
+              <a:rPr lang="en-US" sz="3600" dirty="0"/>
               <a:t>Concatenation</a:t>
             </a:r>
           </a:p>
@@ -5211,7 +5233,7 @@
           <a:p>
             <a:pPr algn="ctr"/>
             <a:r>
-              <a:rPr lang="en-US" sz="3600"/>
+              <a:rPr lang="en-US" sz="3600" dirty="0"/>
               <a:t>Machine Learning Model</a:t>
             </a:r>
           </a:p>
